--- a/app/templates/colegio_de_profesores_del_peru/plantilla_curso.pptx
+++ b/app/templates/colegio_de_profesores_del_peru/plantilla_curso.pptx
@@ -116,7 +116,7 @@
 <file path=ppt/revisionInfo.xml><?xml version="1.0" encoding="utf-8"?>
 <p1510:revInfo xmlns:a="http://schemas.openxmlformats.org/drawingml/2006/main" xmlns:r="http://schemas.openxmlformats.org/officeDocument/2006/relationships" xmlns:p1510="http://schemas.microsoft.com/office/powerpoint/2015/10/main">
   <p1510:revLst>
-    <p1510:client id="{BD89A2BC-EA23-4FA3-A174-4D9DE9232810}" v="17" dt="2025-10-06T18:18:49.099"/>
+    <p1510:client id="{7B1C1687-3DE5-41DD-BCAF-7047FA8AFB9A}" v="4" dt="2026-03-05T19:06:30.414"/>
   </p1510:revLst>
 </p1510:revInfo>
 </file>
@@ -126,73 +126,145 @@
   <pc:docChgLst>
     <pc:chgData name="Benjamín de Jesús Cueva Niño de Guzmán" userId="56da303013910523" providerId="LiveId" clId="{532B7A48-8887-4F62-9537-0BA1FAE83637}"/>
     <pc:docChg chg="undo custSel addSld delSld modSld">
-      <pc:chgData name="Benjamín de Jesús Cueva Niño de Guzmán" userId="56da303013910523" providerId="LiveId" clId="{532B7A48-8887-4F62-9537-0BA1FAE83637}" dt="2025-10-06T18:19:27.684" v="205" actId="478"/>
+      <pc:chgData name="Benjamín de Jesús Cueva Niño de Guzmán" userId="56da303013910523" providerId="LiveId" clId="{532B7A48-8887-4F62-9537-0BA1FAE83637}" dt="2026-03-05T19:06:30.414" v="281"/>
       <pc:docMkLst>
         <pc:docMk/>
       </pc:docMkLst>
-      <pc:sldChg chg="delSp modSp mod">
-        <pc:chgData name="Benjamín de Jesús Cueva Niño de Guzmán" userId="56da303013910523" providerId="LiveId" clId="{532B7A48-8887-4F62-9537-0BA1FAE83637}" dt="2025-10-06T18:19:19.302" v="198" actId="478"/>
+      <pc:sldChg chg="addSp delSp modSp mod">
+        <pc:chgData name="Benjamín de Jesús Cueva Niño de Guzmán" userId="56da303013910523" providerId="LiveId" clId="{532B7A48-8887-4F62-9537-0BA1FAE83637}" dt="2026-03-05T18:18:01.977" v="274" actId="1035"/>
         <pc:sldMkLst>
           <pc:docMk/>
           <pc:sldMk cId="3047749852" sldId="264"/>
         </pc:sldMkLst>
         <pc:spChg chg="mod">
-          <ac:chgData name="Benjamín de Jesús Cueva Niño de Guzmán" userId="56da303013910523" providerId="LiveId" clId="{532B7A48-8887-4F62-9537-0BA1FAE83637}" dt="2025-10-06T18:12:20.350" v="0"/>
+          <ac:chgData name="Benjamín de Jesús Cueva Niño de Guzmán" userId="56da303013910523" providerId="LiveId" clId="{532B7A48-8887-4F62-9537-0BA1FAE83637}" dt="2026-03-05T18:18:01.977" v="274" actId="1035"/>
+          <ac:spMkLst>
+            <pc:docMk/>
+            <pc:sldMk cId="3047749852" sldId="264"/>
+            <ac:spMk id="15" creationId="{00000000-0000-0000-0000-000000000000}"/>
+          </ac:spMkLst>
+        </pc:spChg>
+        <pc:spChg chg="mod">
+          <ac:chgData name="Benjamín de Jesús Cueva Niño de Guzmán" userId="56da303013910523" providerId="LiveId" clId="{532B7A48-8887-4F62-9537-0BA1FAE83637}" dt="2026-03-05T18:17:58.810" v="273" actId="1035"/>
           <ac:spMkLst>
             <pc:docMk/>
             <pc:sldMk cId="3047749852" sldId="264"/>
             <ac:spMk id="16" creationId="{00000000-0000-0000-0000-000000000000}"/>
           </ac:spMkLst>
         </pc:spChg>
-        <pc:spChg chg="mod">
-          <ac:chgData name="Benjamín de Jesús Cueva Niño de Guzmán" userId="56da303013910523" providerId="LiveId" clId="{532B7A48-8887-4F62-9537-0BA1FAE83637}" dt="2025-10-06T18:16:08.002" v="103" actId="20577"/>
+        <pc:spChg chg="del mod">
+          <ac:chgData name="Benjamín de Jesús Cueva Niño de Guzmán" userId="56da303013910523" providerId="LiveId" clId="{532B7A48-8887-4F62-9537-0BA1FAE83637}" dt="2026-03-05T18:17:25.279" v="219" actId="478"/>
           <ac:spMkLst>
             <pc:docMk/>
             <pc:sldMk cId="3047749852" sldId="264"/>
             <ac:spMk id="17" creationId="{00000000-0000-0000-0000-000000000000}"/>
           </ac:spMkLst>
         </pc:spChg>
-        <pc:spChg chg="mod">
-          <ac:chgData name="Benjamín de Jesús Cueva Niño de Guzmán" userId="56da303013910523" providerId="LiveId" clId="{532B7A48-8887-4F62-9537-0BA1FAE83637}" dt="2025-10-06T18:15:56.870" v="96" actId="20577"/>
+        <pc:spChg chg="del">
+          <ac:chgData name="Benjamín de Jesús Cueva Niño de Guzmán" userId="56da303013910523" providerId="LiveId" clId="{532B7A48-8887-4F62-9537-0BA1FAE83637}" dt="2026-03-05T18:17:25.279" v="219" actId="478"/>
           <ac:spMkLst>
             <pc:docMk/>
             <pc:sldMk cId="3047749852" sldId="264"/>
             <ac:spMk id="18" creationId="{00000000-0000-0000-0000-000000000000}"/>
           </ac:spMkLst>
         </pc:spChg>
-        <pc:picChg chg="del">
-          <ac:chgData name="Benjamín de Jesús Cueva Niño de Guzmán" userId="56da303013910523" providerId="LiveId" clId="{532B7A48-8887-4F62-9537-0BA1FAE83637}" dt="2025-10-06T18:19:19.302" v="198" actId="478"/>
-          <ac:picMkLst>
+        <pc:spChg chg="add mod">
+          <ac:chgData name="Benjamín de Jesús Cueva Niño de Guzmán" userId="56da303013910523" providerId="LiveId" clId="{532B7A48-8887-4F62-9537-0BA1FAE83637}" dt="2026-03-05T18:17:58.810" v="273" actId="1035"/>
+          <ac:spMkLst>
             <pc:docMk/>
             <pc:sldMk cId="3047749852" sldId="264"/>
-            <ac:picMk id="20" creationId="{2A58D08C-5987-F518-DED7-3FFEAE982996}"/>
-          </ac:picMkLst>
-        </pc:picChg>
-        <pc:picChg chg="del">
-          <ac:chgData name="Benjamín de Jesús Cueva Niño de Guzmán" userId="56da303013910523" providerId="LiveId" clId="{532B7A48-8887-4F62-9537-0BA1FAE83637}" dt="2025-10-06T18:19:18.890" v="197" actId="478"/>
-          <ac:picMkLst>
-            <pc:docMk/>
-            <pc:sldMk cId="3047749852" sldId="264"/>
-            <ac:picMk id="21" creationId="{2134BA70-53C9-CA9E-7E80-5BC479ADAB4D}"/>
-          </ac:picMkLst>
-        </pc:picChg>
+            <ac:spMk id="20" creationId="{8DFE2F08-FDFA-2FA8-1BFD-5B1E6A5DBE7A}"/>
+          </ac:spMkLst>
+        </pc:spChg>
       </pc:sldChg>
       <pc:sldChg chg="addSp delSp modSp mod">
-        <pc:chgData name="Benjamín de Jesús Cueva Niño de Guzmán" userId="56da303013910523" providerId="LiveId" clId="{532B7A48-8887-4F62-9537-0BA1FAE83637}" dt="2025-10-06T18:19:22.325" v="201" actId="478"/>
+        <pc:chgData name="Benjamín de Jesús Cueva Niño de Guzmán" userId="56da303013910523" providerId="LiveId" clId="{532B7A48-8887-4F62-9537-0BA1FAE83637}" dt="2026-03-05T19:06:30.414" v="281"/>
         <pc:sldMkLst>
           <pc:docMk/>
           <pc:sldMk cId="1210459346" sldId="265"/>
         </pc:sldMkLst>
-        <pc:graphicFrameChg chg="mod modGraphic">
-          <ac:chgData name="Benjamín de Jesús Cueva Niño de Guzmán" userId="56da303013910523" providerId="LiveId" clId="{532B7A48-8887-4F62-9537-0BA1FAE83637}" dt="2025-10-06T18:15:17.121" v="57" actId="20577"/>
+        <pc:spChg chg="add mod">
+          <ac:chgData name="Benjamín de Jesús Cueva Niño de Guzmán" userId="56da303013910523" providerId="LiveId" clId="{532B7A48-8887-4F62-9537-0BA1FAE83637}" dt="2026-03-05T19:06:30.414" v="281"/>
+          <ac:spMkLst>
+            <pc:docMk/>
+            <pc:sldMk cId="1210459346" sldId="265"/>
+            <ac:spMk id="3" creationId="{31A2BAB6-DD06-AFB7-A779-64054FB1AAEC}"/>
+          </ac:spMkLst>
+        </pc:spChg>
+        <pc:spChg chg="del">
+          <ac:chgData name="Benjamín de Jesús Cueva Niño de Guzmán" userId="56da303013910523" providerId="LiveId" clId="{532B7A48-8887-4F62-9537-0BA1FAE83637}" dt="2026-03-05T18:18:13.031" v="275" actId="478"/>
+          <ac:spMkLst>
+            <pc:docMk/>
+            <pc:sldMk cId="1210459346" sldId="265"/>
+            <ac:spMk id="4" creationId="{385E0D12-7AAE-301C-8B48-6FE48D0B69EE}"/>
+          </ac:spMkLst>
+        </pc:spChg>
+        <pc:spChg chg="mod">
+          <ac:chgData name="Benjamín de Jesús Cueva Niño de Guzmán" userId="56da303013910523" providerId="LiveId" clId="{532B7A48-8887-4F62-9537-0BA1FAE83637}" dt="2026-03-02T15:14:43.634" v="209"/>
+          <ac:spMkLst>
+            <pc:docMk/>
+            <pc:sldMk cId="1210459346" sldId="265"/>
+            <ac:spMk id="5" creationId="{642AFA5E-411D-36E9-F3C9-5C13895B0119}"/>
+          </ac:spMkLst>
+        </pc:spChg>
+        <pc:spChg chg="mod">
+          <ac:chgData name="Benjamín de Jesús Cueva Niño de Guzmán" userId="56da303013910523" providerId="LiveId" clId="{532B7A48-8887-4F62-9537-0BA1FAE83637}" dt="2026-03-02T15:14:43.634" v="209"/>
+          <ac:spMkLst>
+            <pc:docMk/>
+            <pc:sldMk cId="1210459346" sldId="265"/>
+            <ac:spMk id="7" creationId="{B681738F-E09F-799A-2C96-1D1BD4FF4EB3}"/>
+          </ac:spMkLst>
+        </pc:spChg>
+        <pc:spChg chg="add del mod">
+          <ac:chgData name="Benjamín de Jesús Cueva Niño de Guzmán" userId="56da303013910523" providerId="LiveId" clId="{532B7A48-8887-4F62-9537-0BA1FAE83637}" dt="2026-03-05T19:06:30.110" v="280" actId="478"/>
+          <ac:spMkLst>
+            <pc:docMk/>
+            <pc:sldMk cId="1210459346" sldId="265"/>
+            <ac:spMk id="8" creationId="{91C54B64-D52E-06F8-300E-040E91457B08}"/>
+          </ac:spMkLst>
+        </pc:spChg>
+        <pc:spChg chg="add mod">
+          <ac:chgData name="Benjamín de Jesús Cueva Niño de Guzmán" userId="56da303013910523" providerId="LiveId" clId="{532B7A48-8887-4F62-9537-0BA1FAE83637}" dt="2026-03-05T18:18:17.181" v="276"/>
+          <ac:spMkLst>
+            <pc:docMk/>
+            <pc:sldMk cId="1210459346" sldId="265"/>
+            <ac:spMk id="13" creationId="{5AFDFDE8-80C6-7D39-B795-B36C64E8F5A2}"/>
+          </ac:spMkLst>
+        </pc:spChg>
+        <pc:grpChg chg="add mod">
+          <ac:chgData name="Benjamín de Jesús Cueva Niño de Guzmán" userId="56da303013910523" providerId="LiveId" clId="{532B7A48-8887-4F62-9537-0BA1FAE83637}" dt="2026-03-02T15:14:43.634" v="209"/>
+          <ac:grpSpMkLst>
+            <pc:docMk/>
+            <pc:sldMk cId="1210459346" sldId="265"/>
+            <ac:grpSpMk id="2" creationId="{312778E5-C5C3-1423-0514-C1DD238BD466}"/>
+          </ac:grpSpMkLst>
+        </pc:grpChg>
+        <pc:graphicFrameChg chg="add mod">
+          <ac:chgData name="Benjamín de Jesús Cueva Niño de Guzmán" userId="56da303013910523" providerId="LiveId" clId="{532B7A48-8887-4F62-9537-0BA1FAE83637}" dt="2026-03-05T18:18:17.181" v="276"/>
+          <ac:graphicFrameMkLst>
+            <pc:docMk/>
+            <pc:sldMk cId="1210459346" sldId="265"/>
+            <ac:graphicFrameMk id="9" creationId="{9A93C8F0-4882-DD02-EEEB-8F91FEBA43CD}"/>
+          </ac:graphicFrameMkLst>
+        </pc:graphicFrameChg>
+        <pc:graphicFrameChg chg="add mod">
+          <ac:chgData name="Benjamín de Jesús Cueva Niño de Guzmán" userId="56da303013910523" providerId="LiveId" clId="{532B7A48-8887-4F62-9537-0BA1FAE83637}" dt="2026-03-05T18:18:17.181" v="276"/>
+          <ac:graphicFrameMkLst>
+            <pc:docMk/>
+            <pc:sldMk cId="1210459346" sldId="265"/>
+            <ac:graphicFrameMk id="10" creationId="{F7E3DDC4-DC0E-989C-291E-FB7DFC1F9FC0}"/>
+          </ac:graphicFrameMkLst>
+        </pc:graphicFrameChg>
+        <pc:graphicFrameChg chg="del">
+          <ac:chgData name="Benjamín de Jesús Cueva Niño de Guzmán" userId="56da303013910523" providerId="LiveId" clId="{532B7A48-8887-4F62-9537-0BA1FAE83637}" dt="2026-03-05T18:18:13.031" v="275" actId="478"/>
           <ac:graphicFrameMkLst>
             <pc:docMk/>
             <pc:sldMk cId="1210459346" sldId="265"/>
             <ac:graphicFrameMk id="20" creationId="{00000000-0000-0000-0000-000000000000}"/>
           </ac:graphicFrameMkLst>
         </pc:graphicFrameChg>
-        <pc:graphicFrameChg chg="modGraphic">
-          <ac:chgData name="Benjamín de Jesús Cueva Niño de Guzmán" userId="56da303013910523" providerId="LiveId" clId="{532B7A48-8887-4F62-9537-0BA1FAE83637}" dt="2025-10-06T18:14:58.690" v="50" actId="20577"/>
+        <pc:graphicFrameChg chg="del">
+          <ac:chgData name="Benjamín de Jesús Cueva Niño de Guzmán" userId="56da303013910523" providerId="LiveId" clId="{532B7A48-8887-4F62-9537-0BA1FAE83637}" dt="2026-03-05T18:18:13.031" v="275" actId="478"/>
           <ac:graphicFrameMkLst>
             <pc:docMk/>
             <pc:sldMk cId="1210459346" sldId="265"/>
@@ -200,229 +272,29 @@
           </ac:graphicFrameMkLst>
         </pc:graphicFrameChg>
         <pc:graphicFrameChg chg="mod modGraphic">
-          <ac:chgData name="Benjamín de Jesús Cueva Niño de Guzmán" userId="56da303013910523" providerId="LiveId" clId="{532B7A48-8887-4F62-9537-0BA1FAE83637}" dt="2025-10-06T18:16:32.141" v="107" actId="2165"/>
+          <ac:chgData name="Benjamín de Jesús Cueva Niño de Guzmán" userId="56da303013910523" providerId="LiveId" clId="{532B7A48-8887-4F62-9537-0BA1FAE83637}" dt="2026-03-05T18:18:21.404" v="279" actId="404"/>
           <ac:graphicFrameMkLst>
             <pc:docMk/>
             <pc:sldMk cId="1210459346" sldId="265"/>
             <ac:graphicFrameMk id="29" creationId="{00000000-0000-0000-0000-000000000000}"/>
           </ac:graphicFrameMkLst>
         </pc:graphicFrameChg>
-        <pc:picChg chg="add mod">
-          <ac:chgData name="Benjamín de Jesús Cueva Niño de Guzmán" userId="56da303013910523" providerId="LiveId" clId="{532B7A48-8887-4F62-9537-0BA1FAE83637}" dt="2025-10-06T18:16:20.491" v="106" actId="1076"/>
+        <pc:picChg chg="del">
+          <ac:chgData name="Benjamín de Jesús Cueva Niño de Guzmán" userId="56da303013910523" providerId="LiveId" clId="{532B7A48-8887-4F62-9537-0BA1FAE83637}" dt="2026-03-05T18:18:13.031" v="275" actId="478"/>
           <ac:picMkLst>
             <pc:docMk/>
             <pc:sldMk cId="1210459346" sldId="265"/>
-            <ac:picMk id="2" creationId="{A2DC8FEA-B25E-2C78-E00B-93CC39D45FA3}"/>
+            <ac:picMk id="3" creationId="{AB7EE0B6-B919-423B-6A1B-5DB7F9F6C8DB}"/>
           </ac:picMkLst>
         </pc:picChg>
-        <pc:picChg chg="del">
-          <ac:chgData name="Benjamín de Jesús Cueva Niño de Guzmán" userId="56da303013910523" providerId="LiveId" clId="{532B7A48-8887-4F62-9537-0BA1FAE83637}" dt="2025-10-06T18:12:29.385" v="8" actId="478"/>
+        <pc:picChg chg="add mod">
+          <ac:chgData name="Benjamín de Jesús Cueva Niño de Guzmán" userId="56da303013910523" providerId="LiveId" clId="{532B7A48-8887-4F62-9537-0BA1FAE83637}" dt="2026-03-05T18:18:17.181" v="276"/>
           <ac:picMkLst>
             <pc:docMk/>
             <pc:sldMk cId="1210459346" sldId="265"/>
-            <ac:picMk id="3" creationId="{DD8E373B-7AB0-4152-1FF0-C517549F3ACF}"/>
+            <ac:picMk id="11" creationId="{204FCACD-2965-14E0-CE9E-D95D09074B30}"/>
           </ac:picMkLst>
         </pc:picChg>
-        <pc:picChg chg="del">
-          <ac:chgData name="Benjamín de Jesús Cueva Niño de Guzmán" userId="56da303013910523" providerId="LiveId" clId="{532B7A48-8887-4F62-9537-0BA1FAE83637}" dt="2025-10-06T18:19:22.325" v="201" actId="478"/>
-          <ac:picMkLst>
-            <pc:docMk/>
-            <pc:sldMk cId="1210459346" sldId="265"/>
-            <ac:picMk id="13" creationId="{00000000-0000-0000-0000-000000000000}"/>
-          </ac:picMkLst>
-        </pc:picChg>
-      </pc:sldChg>
-      <pc:sldChg chg="delSp modSp add mod">
-        <pc:chgData name="Benjamín de Jesús Cueva Niño de Guzmán" userId="56da303013910523" providerId="LiveId" clId="{532B7A48-8887-4F62-9537-0BA1FAE83637}" dt="2025-10-06T18:19:20.929" v="200" actId="478"/>
-        <pc:sldMkLst>
-          <pc:docMk/>
-          <pc:sldMk cId="276107073" sldId="266"/>
-        </pc:sldMkLst>
-        <pc:spChg chg="mod">
-          <ac:chgData name="Benjamín de Jesús Cueva Niño de Guzmán" userId="56da303013910523" providerId="LiveId" clId="{532B7A48-8887-4F62-9537-0BA1FAE83637}" dt="2025-10-06T18:17:15.688" v="143" actId="20577"/>
-          <ac:spMkLst>
-            <pc:docMk/>
-            <pc:sldMk cId="276107073" sldId="266"/>
-            <ac:spMk id="17" creationId="{D7F5F1E9-B8A2-7307-A6A2-44518A748078}"/>
-          </ac:spMkLst>
-        </pc:spChg>
-        <pc:spChg chg="mod">
-          <ac:chgData name="Benjamín de Jesús Cueva Niño de Guzmán" userId="56da303013910523" providerId="LiveId" clId="{532B7A48-8887-4F62-9537-0BA1FAE83637}" dt="2025-10-06T18:19:00.322" v="196" actId="1035"/>
-          <ac:spMkLst>
-            <pc:docMk/>
-            <pc:sldMk cId="276107073" sldId="266"/>
-            <ac:spMk id="18" creationId="{8BF6BCB3-B99F-7872-69DB-1809D9107420}"/>
-          </ac:spMkLst>
-        </pc:spChg>
-        <pc:picChg chg="del">
-          <ac:chgData name="Benjamín de Jesús Cueva Niño de Guzmán" userId="56da303013910523" providerId="LiveId" clId="{532B7A48-8887-4F62-9537-0BA1FAE83637}" dt="2025-10-06T18:19:20.929" v="200" actId="478"/>
-          <ac:picMkLst>
-            <pc:docMk/>
-            <pc:sldMk cId="276107073" sldId="266"/>
-            <ac:picMk id="20" creationId="{47A74871-3CFC-C009-87BA-AA5A1CDE8AA5}"/>
-          </ac:picMkLst>
-        </pc:picChg>
-        <pc:picChg chg="del">
-          <ac:chgData name="Benjamín de Jesús Cueva Niño de Guzmán" userId="56da303013910523" providerId="LiveId" clId="{532B7A48-8887-4F62-9537-0BA1FAE83637}" dt="2025-10-06T18:19:20.574" v="199" actId="478"/>
-          <ac:picMkLst>
-            <pc:docMk/>
-            <pc:sldMk cId="276107073" sldId="266"/>
-            <ac:picMk id="21" creationId="{D827DD29-6E47-DE8E-4DE6-A1AA1FCAF833}"/>
-          </ac:picMkLst>
-        </pc:picChg>
-      </pc:sldChg>
-      <pc:sldChg chg="del">
-        <pc:chgData name="Benjamín de Jesús Cueva Niño de Guzmán" userId="56da303013910523" providerId="LiveId" clId="{532B7A48-8887-4F62-9537-0BA1FAE83637}" dt="2025-10-06T18:12:22.744" v="3" actId="47"/>
-        <pc:sldMkLst>
-          <pc:docMk/>
-          <pc:sldMk cId="1908454862" sldId="266"/>
-        </pc:sldMkLst>
-      </pc:sldChg>
-      <pc:sldChg chg="del">
-        <pc:chgData name="Benjamín de Jesús Cueva Niño de Guzmán" userId="56da303013910523" providerId="LiveId" clId="{532B7A48-8887-4F62-9537-0BA1FAE83637}" dt="2025-10-06T18:12:22.908" v="4" actId="47"/>
-        <pc:sldMkLst>
-          <pc:docMk/>
-          <pc:sldMk cId="2922880924" sldId="267"/>
-        </pc:sldMkLst>
-      </pc:sldChg>
-      <pc:sldChg chg="addSp delSp modSp add mod replId">
-        <pc:chgData name="Benjamín de Jesús Cueva Niño de Guzmán" userId="56da303013910523" providerId="LiveId" clId="{532B7A48-8887-4F62-9537-0BA1FAE83637}" dt="2025-10-06T18:19:23.582" v="202" actId="478"/>
-        <pc:sldMkLst>
-          <pc:docMk/>
-          <pc:sldMk cId="2925751976" sldId="267"/>
-        </pc:sldMkLst>
-        <pc:graphicFrameChg chg="mod modGraphic">
-          <ac:chgData name="Benjamín de Jesús Cueva Niño de Guzmán" userId="56da303013910523" providerId="LiveId" clId="{532B7A48-8887-4F62-9537-0BA1FAE83637}" dt="2025-10-06T18:17:34.752" v="147"/>
-          <ac:graphicFrameMkLst>
-            <pc:docMk/>
-            <pc:sldMk cId="2925751976" sldId="267"/>
-            <ac:graphicFrameMk id="20" creationId="{6F696A06-7244-881E-8243-EA6F2C2DB2A9}"/>
-          </ac:graphicFrameMkLst>
-        </pc:graphicFrameChg>
-        <pc:graphicFrameChg chg="mod">
-          <ac:chgData name="Benjamín de Jesús Cueva Niño de Guzmán" userId="56da303013910523" providerId="LiveId" clId="{532B7A48-8887-4F62-9537-0BA1FAE83637}" dt="2025-10-06T18:17:42.034" v="148"/>
-          <ac:graphicFrameMkLst>
-            <pc:docMk/>
-            <pc:sldMk cId="2925751976" sldId="267"/>
-            <ac:graphicFrameMk id="29" creationId="{EEE0AAD5-D72A-BD41-F101-EE9FB15CECCA}"/>
-          </ac:graphicFrameMkLst>
-        </pc:graphicFrameChg>
-        <pc:picChg chg="del">
-          <ac:chgData name="Benjamín de Jesús Cueva Niño de Guzmán" userId="56da303013910523" providerId="LiveId" clId="{532B7A48-8887-4F62-9537-0BA1FAE83637}" dt="2025-10-06T18:16:58.244" v="125" actId="478"/>
-          <ac:picMkLst>
-            <pc:docMk/>
-            <pc:sldMk cId="2925751976" sldId="267"/>
-            <ac:picMk id="2" creationId="{9B956443-E427-A7E9-8E68-755857E2D968}"/>
-          </ac:picMkLst>
-        </pc:picChg>
-        <pc:picChg chg="add mod">
-          <ac:chgData name="Benjamín de Jesús Cueva Niño de Guzmán" userId="56da303013910523" providerId="LiveId" clId="{532B7A48-8887-4F62-9537-0BA1FAE83637}" dt="2025-10-06T18:18:37.831" v="172" actId="1076"/>
-          <ac:picMkLst>
-            <pc:docMk/>
-            <pc:sldMk cId="2925751976" sldId="267"/>
-            <ac:picMk id="3" creationId="{AFB74049-2EBF-47A0-027E-55BEEA18BC54}"/>
-          </ac:picMkLst>
-        </pc:picChg>
-        <pc:picChg chg="del">
-          <ac:chgData name="Benjamín de Jesús Cueva Niño de Guzmán" userId="56da303013910523" providerId="LiveId" clId="{532B7A48-8887-4F62-9537-0BA1FAE83637}" dt="2025-10-06T18:19:23.582" v="202" actId="478"/>
-          <ac:picMkLst>
-            <pc:docMk/>
-            <pc:sldMk cId="2925751976" sldId="267"/>
-            <ac:picMk id="13" creationId="{CA537C7C-ED85-2B15-2328-C5BB3A65EDFA}"/>
-          </ac:picMkLst>
-        </pc:picChg>
-      </pc:sldChg>
-      <pc:sldChg chg="del">
-        <pc:chgData name="Benjamín de Jesús Cueva Niño de Guzmán" userId="56da303013910523" providerId="LiveId" clId="{532B7A48-8887-4F62-9537-0BA1FAE83637}" dt="2025-10-06T18:12:22.063" v="1" actId="47"/>
-        <pc:sldMkLst>
-          <pc:docMk/>
-          <pc:sldMk cId="219967043" sldId="268"/>
-        </pc:sldMkLst>
-      </pc:sldChg>
-      <pc:sldChg chg="delSp modSp add mod">
-        <pc:chgData name="Benjamín de Jesús Cueva Niño de Guzmán" userId="56da303013910523" providerId="LiveId" clId="{532B7A48-8887-4F62-9537-0BA1FAE83637}" dt="2025-10-06T18:19:25.389" v="204" actId="478"/>
-        <pc:sldMkLst>
-          <pc:docMk/>
-          <pc:sldMk cId="1138082283" sldId="268"/>
-        </pc:sldMkLst>
-        <pc:spChg chg="mod">
-          <ac:chgData name="Benjamín de Jesús Cueva Niño de Guzmán" userId="56da303013910523" providerId="LiveId" clId="{532B7A48-8887-4F62-9537-0BA1FAE83637}" dt="2025-10-06T18:18:08.301" v="164" actId="20577"/>
-          <ac:spMkLst>
-            <pc:docMk/>
-            <pc:sldMk cId="1138082283" sldId="268"/>
-            <ac:spMk id="17" creationId="{FFBE138A-24C5-F363-015F-5F42BA98B0AD}"/>
-          </ac:spMkLst>
-        </pc:spChg>
-        <pc:spChg chg="mod">
-          <ac:chgData name="Benjamín de Jesús Cueva Niño de Guzmán" userId="56da303013910523" providerId="LiveId" clId="{532B7A48-8887-4F62-9537-0BA1FAE83637}" dt="2025-10-06T18:18:55.529" v="188" actId="1035"/>
-          <ac:spMkLst>
-            <pc:docMk/>
-            <pc:sldMk cId="1138082283" sldId="268"/>
-            <ac:spMk id="18" creationId="{1AA9C407-9018-7C46-625B-E4914F1E5529}"/>
-          </ac:spMkLst>
-        </pc:spChg>
-        <pc:picChg chg="del">
-          <ac:chgData name="Benjamín de Jesús Cueva Niño de Guzmán" userId="56da303013910523" providerId="LiveId" clId="{532B7A48-8887-4F62-9537-0BA1FAE83637}" dt="2025-10-06T18:19:25.389" v="204" actId="478"/>
-          <ac:picMkLst>
-            <pc:docMk/>
-            <pc:sldMk cId="1138082283" sldId="268"/>
-            <ac:picMk id="20" creationId="{3A94F348-9B05-3092-C172-4D31A2F15541}"/>
-          </ac:picMkLst>
-        </pc:picChg>
-        <pc:picChg chg="del">
-          <ac:chgData name="Benjamín de Jesús Cueva Niño de Guzmán" userId="56da303013910523" providerId="LiveId" clId="{532B7A48-8887-4F62-9537-0BA1FAE83637}" dt="2025-10-06T18:19:24.986" v="203" actId="478"/>
-          <ac:picMkLst>
-            <pc:docMk/>
-            <pc:sldMk cId="1138082283" sldId="268"/>
-            <ac:picMk id="21" creationId="{920BC8B9-9E28-F6C7-BE31-8DFE0412DB80}"/>
-          </ac:picMkLst>
-        </pc:picChg>
-      </pc:sldChg>
-      <pc:sldChg chg="addSp delSp modSp add mod replId">
-        <pc:chgData name="Benjamín de Jesús Cueva Niño de Guzmán" userId="56da303013910523" providerId="LiveId" clId="{532B7A48-8887-4F62-9537-0BA1FAE83637}" dt="2025-10-06T18:19:27.684" v="205" actId="478"/>
-        <pc:sldMkLst>
-          <pc:docMk/>
-          <pc:sldMk cId="457009047" sldId="269"/>
-        </pc:sldMkLst>
-        <pc:graphicFrameChg chg="mod modGraphic">
-          <ac:chgData name="Benjamín de Jesús Cueva Niño de Guzmán" userId="56da303013910523" providerId="LiveId" clId="{532B7A48-8887-4F62-9537-0BA1FAE83637}" dt="2025-10-06T18:18:19.986" v="167"/>
-          <ac:graphicFrameMkLst>
-            <pc:docMk/>
-            <pc:sldMk cId="457009047" sldId="269"/>
-            <ac:graphicFrameMk id="20" creationId="{F5FC5875-00BA-867A-F43C-E5A330169CEA}"/>
-          </ac:graphicFrameMkLst>
-        </pc:graphicFrameChg>
-        <pc:graphicFrameChg chg="mod">
-          <ac:chgData name="Benjamín de Jesús Cueva Niño de Guzmán" userId="56da303013910523" providerId="LiveId" clId="{532B7A48-8887-4F62-9537-0BA1FAE83637}" dt="2025-10-06T18:18:49.099" v="173"/>
-          <ac:graphicFrameMkLst>
-            <pc:docMk/>
-            <pc:sldMk cId="457009047" sldId="269"/>
-            <ac:graphicFrameMk id="29" creationId="{DB3B08CC-EEE5-3953-62E5-550A099CA235}"/>
-          </ac:graphicFrameMkLst>
-        </pc:graphicFrameChg>
-        <pc:picChg chg="add mod">
-          <ac:chgData name="Benjamín de Jesús Cueva Niño de Guzmán" userId="56da303013910523" providerId="LiveId" clId="{532B7A48-8887-4F62-9537-0BA1FAE83637}" dt="2025-10-06T18:18:26.600" v="169" actId="1076"/>
-          <ac:picMkLst>
-            <pc:docMk/>
-            <pc:sldMk cId="457009047" sldId="269"/>
-            <ac:picMk id="2" creationId="{F8A412A7-F1FA-E0A8-183F-21BFA24651C9}"/>
-          </ac:picMkLst>
-        </pc:picChg>
-        <pc:picChg chg="del">
-          <ac:chgData name="Benjamín de Jesús Cueva Niño de Guzmán" userId="56da303013910523" providerId="LiveId" clId="{532B7A48-8887-4F62-9537-0BA1FAE83637}" dt="2025-10-06T18:19:27.684" v="205" actId="478"/>
-          <ac:picMkLst>
-            <pc:docMk/>
-            <pc:sldMk cId="457009047" sldId="269"/>
-            <ac:picMk id="13" creationId="{4638473F-8CB5-E8AE-2AAE-98E821A440F8}"/>
-          </ac:picMkLst>
-        </pc:picChg>
-      </pc:sldChg>
-      <pc:sldChg chg="del">
-        <pc:chgData name="Benjamín de Jesús Cueva Niño de Guzmán" userId="56da303013910523" providerId="LiveId" clId="{532B7A48-8887-4F62-9537-0BA1FAE83637}" dt="2025-10-06T18:12:22.175" v="2" actId="47"/>
-        <pc:sldMkLst>
-          <pc:docMk/>
-          <pc:sldMk cId="2902788057" sldId="269"/>
-        </pc:sldMkLst>
       </pc:sldChg>
     </pc:docChg>
   </pc:docChgLst>
@@ -560,7 +432,7 @@
           <a:p>
             <a:fld id="{6B5BCF65-E86E-467A-B19A-9BBB66F1E598}" type="datetimeFigureOut">
               <a:rPr lang="es-PE" smtClean="0"/>
-              <a:t>14/02/2026</a:t>
+              <a:t>5/03/2026</a:t>
             </a:fld>
             <a:endParaRPr lang="es-PE"/>
           </a:p>
@@ -730,7 +602,7 @@
           <a:p>
             <a:fld id="{6B5BCF65-E86E-467A-B19A-9BBB66F1E598}" type="datetimeFigureOut">
               <a:rPr lang="es-PE" smtClean="0"/>
-              <a:t>14/02/2026</a:t>
+              <a:t>5/03/2026</a:t>
             </a:fld>
             <a:endParaRPr lang="es-PE"/>
           </a:p>
@@ -910,7 +782,7 @@
           <a:p>
             <a:fld id="{6B5BCF65-E86E-467A-B19A-9BBB66F1E598}" type="datetimeFigureOut">
               <a:rPr lang="es-PE" smtClean="0"/>
-              <a:t>14/02/2026</a:t>
+              <a:t>5/03/2026</a:t>
             </a:fld>
             <a:endParaRPr lang="es-PE"/>
           </a:p>
@@ -1080,7 +952,7 @@
           <a:p>
             <a:fld id="{6B5BCF65-E86E-467A-B19A-9BBB66F1E598}" type="datetimeFigureOut">
               <a:rPr lang="es-PE" smtClean="0"/>
-              <a:t>14/02/2026</a:t>
+              <a:t>5/03/2026</a:t>
             </a:fld>
             <a:endParaRPr lang="es-PE"/>
           </a:p>
@@ -1324,7 +1196,7 @@
           <a:p>
             <a:fld id="{6B5BCF65-E86E-467A-B19A-9BBB66F1E598}" type="datetimeFigureOut">
               <a:rPr lang="es-PE" smtClean="0"/>
-              <a:t>14/02/2026</a:t>
+              <a:t>5/03/2026</a:t>
             </a:fld>
             <a:endParaRPr lang="es-PE"/>
           </a:p>
@@ -1556,7 +1428,7 @@
           <a:p>
             <a:fld id="{6B5BCF65-E86E-467A-B19A-9BBB66F1E598}" type="datetimeFigureOut">
               <a:rPr lang="es-PE" smtClean="0"/>
-              <a:t>14/02/2026</a:t>
+              <a:t>5/03/2026</a:t>
             </a:fld>
             <a:endParaRPr lang="es-PE"/>
           </a:p>
@@ -1923,7 +1795,7 @@
           <a:p>
             <a:fld id="{6B5BCF65-E86E-467A-B19A-9BBB66F1E598}" type="datetimeFigureOut">
               <a:rPr lang="es-PE" smtClean="0"/>
-              <a:t>14/02/2026</a:t>
+              <a:t>5/03/2026</a:t>
             </a:fld>
             <a:endParaRPr lang="es-PE"/>
           </a:p>
@@ -2041,7 +1913,7 @@
           <a:p>
             <a:fld id="{6B5BCF65-E86E-467A-B19A-9BBB66F1E598}" type="datetimeFigureOut">
               <a:rPr lang="es-PE" smtClean="0"/>
-              <a:t>14/02/2026</a:t>
+              <a:t>5/03/2026</a:t>
             </a:fld>
             <a:endParaRPr lang="es-PE"/>
           </a:p>
@@ -2136,7 +2008,7 @@
           <a:p>
             <a:fld id="{6B5BCF65-E86E-467A-B19A-9BBB66F1E598}" type="datetimeFigureOut">
               <a:rPr lang="es-PE" smtClean="0"/>
-              <a:t>14/02/2026</a:t>
+              <a:t>5/03/2026</a:t>
             </a:fld>
             <a:endParaRPr lang="es-PE"/>
           </a:p>
@@ -2413,7 +2285,7 @@
           <a:p>
             <a:fld id="{6B5BCF65-E86E-467A-B19A-9BBB66F1E598}" type="datetimeFigureOut">
               <a:rPr lang="es-PE" smtClean="0"/>
-              <a:t>14/02/2026</a:t>
+              <a:t>5/03/2026</a:t>
             </a:fld>
             <a:endParaRPr lang="es-PE"/>
           </a:p>
@@ -2670,7 +2542,7 @@
           <a:p>
             <a:fld id="{6B5BCF65-E86E-467A-B19A-9BBB66F1E598}" type="datetimeFigureOut">
               <a:rPr lang="es-PE" smtClean="0"/>
-              <a:t>14/02/2026</a:t>
+              <a:t>5/03/2026</a:t>
             </a:fld>
             <a:endParaRPr lang="es-PE"/>
           </a:p>
@@ -2883,7 +2755,7 @@
           <a:p>
             <a:fld id="{6B5BCF65-E86E-467A-B19A-9BBB66F1E598}" type="datetimeFigureOut">
               <a:rPr lang="es-PE" smtClean="0"/>
-              <a:t>14/02/2026</a:t>
+              <a:t>5/03/2026</a:t>
             </a:fld>
             <a:endParaRPr lang="es-PE"/>
           </a:p>
@@ -3424,7 +3296,7 @@
         </p:nvSpPr>
         <p:spPr>
           <a:xfrm>
-            <a:off x="4252904" y="1340914"/>
+            <a:off x="4252904" y="1256935"/>
             <a:ext cx="1400192" cy="369332"/>
           </a:xfrm>
           <a:prstGeom prst="rect">
@@ -3455,7 +3327,7 @@
         </p:nvSpPr>
         <p:spPr>
           <a:xfrm>
-            <a:off x="2493035" y="1556955"/>
+            <a:off x="2493035" y="1482307"/>
             <a:ext cx="4919937" cy="523220"/>
           </a:xfrm>
           <a:prstGeom prst="rect">
@@ -3475,107 +3347,6 @@
                 <a:latin typeface="Britannic Bold" panose="020B0903060703020204" pitchFamily="34" charset="0"/>
               </a:rPr>
               <a:t>{{NOMBRES}} {{APELLIDOS}}</a:t>
-            </a:r>
-          </a:p>
-        </p:txBody>
-      </p:sp>
-      <p:sp>
-        <p:nvSpPr>
-          <p:cNvPr id="17" name="CuadroTexto 16"/>
-          <p:cNvSpPr txBox="1"/>
-          <p:nvPr/>
-        </p:nvSpPr>
-        <p:spPr>
-          <a:xfrm>
-            <a:off x="-90772" y="1962231"/>
-            <a:ext cx="10087570" cy="1908215"/>
-          </a:xfrm>
-          <a:prstGeom prst="rect">
-            <a:avLst/>
-          </a:prstGeom>
-          <a:noFill/>
-        </p:spPr>
-        <p:txBody>
-          <a:bodyPr wrap="none" rtlCol="0">
-            <a:spAutoFit/>
-          </a:bodyPr>
-          <a:lstStyle/>
-          <a:p>
-            <a:pPr algn="ctr"/>
-            <a:r>
-              <a:rPr lang="es-PE" b="1" dirty="0"/>
-              <a:t>Por haber culminado satisfactoriamente el CURSO en:</a:t>
-            </a:r>
-            <a:endParaRPr lang="es-PE" sz="600" b="1" dirty="0"/>
-          </a:p>
-          <a:p>
-            <a:pPr algn="ctr"/>
-            <a:r>
-              <a:rPr lang="es-PE" sz="2800">
-                <a:latin typeface="Britannic Bold" panose="020B0903060703020204" pitchFamily="34" charset="0"/>
-              </a:rPr>
-              <a:t>“{{TEMA_DIPLOMADO}}”</a:t>
-            </a:r>
-            <a:endParaRPr lang="es-PE" sz="2800" dirty="0">
-              <a:latin typeface="Britannic Bold" panose="020B0903060703020204" pitchFamily="34" charset="0"/>
-            </a:endParaRPr>
-          </a:p>
-          <a:p>
-            <a:pPr algn="ctr"/>
-            <a:r>
-              <a:rPr lang="es-PE" b="1" dirty="0"/>
-              <a:t>Realizado del {{FECHA_INICIO}} al {{FECHA_FIN}}, con una</a:t>
-            </a:r>
-          </a:p>
-          <a:p>
-            <a:pPr algn="ctr"/>
-            <a:r>
-              <a:rPr lang="es-PE" b="1" dirty="0"/>
-              <a:t>duración de {{HORAS_ACADEMICAS}} horas lectivas y {{CREDITOS_ACADEMICOS}} créditos Académicos.</a:t>
-            </a:r>
-          </a:p>
-          <a:p>
-            <a:pPr algn="ctr"/>
-            <a:r>
-              <a:rPr lang="es-PE" b="1" dirty="0"/>
-              <a:t>Por tanto, se expide el presente Certificado, otorgándole los</a:t>
-            </a:r>
-          </a:p>
-          <a:p>
-            <a:pPr algn="ctr"/>
-            <a:r>
-              <a:rPr lang="es-PE" b="1" dirty="0"/>
-              <a:t>privilegios y consideraciones que le corresponden.</a:t>
-            </a:r>
-          </a:p>
-        </p:txBody>
-      </p:sp>
-      <p:sp>
-        <p:nvSpPr>
-          <p:cNvPr id="18" name="CuadroTexto 17"/>
-          <p:cNvSpPr txBox="1"/>
-          <p:nvPr/>
-        </p:nvSpPr>
-        <p:spPr>
-          <a:xfrm>
-            <a:off x="5752362" y="4186375"/>
-            <a:ext cx="3629904" cy="369332"/>
-          </a:xfrm>
-          <a:prstGeom prst="rect">
-            <a:avLst/>
-          </a:prstGeom>
-          <a:noFill/>
-        </p:spPr>
-        <p:txBody>
-          <a:bodyPr wrap="none" rtlCol="0">
-            <a:spAutoFit/>
-          </a:bodyPr>
-          <a:lstStyle/>
-          <a:p>
-            <a:pPr algn="r"/>
-            <a:r>
-              <a:rPr lang="es-PE" b="1" dirty="0"/>
-              <a:t>Trujillo, {{FECHA_EMISION_LARGA}}</a:t>
             </a:r>
           </a:p>
         </p:txBody>
@@ -4015,6 +3786,91 @@
           </a:extLst>
         </p:spPr>
       </p:pic>
+      <p:sp>
+        <p:nvSpPr>
+          <p:cNvPr id="20" name="CuadroTexto 19">
+            <a:extLst>
+              <a:ext uri="{FF2B5EF4-FFF2-40B4-BE49-F238E27FC236}">
+                <a16:creationId xmlns:a16="http://schemas.microsoft.com/office/drawing/2014/main" id="{8DFE2F08-FDFA-2FA8-1BFD-5B1E6A5DBE7A}"/>
+              </a:ext>
+            </a:extLst>
+          </p:cNvPr>
+          <p:cNvSpPr txBox="1"/>
+          <p:nvPr/>
+        </p:nvSpPr>
+        <p:spPr>
+          <a:xfrm>
+            <a:off x="380775" y="1906245"/>
+            <a:ext cx="9144451" cy="2523768"/>
+          </a:xfrm>
+          <a:prstGeom prst="rect">
+            <a:avLst/>
+          </a:prstGeom>
+          <a:noFill/>
+        </p:spPr>
+        <p:txBody>
+          <a:bodyPr wrap="square" rtlCol="0" anchor="t" anchorCtr="1">
+            <a:spAutoFit/>
+          </a:bodyPr>
+          <a:lstStyle/>
+          <a:p>
+            <a:pPr algn="ctr"/>
+            <a:r>
+              <a:rPr lang="es-PE" b="1" dirty="0"/>
+              <a:t>Por haber culminado satisfactoriamente el CURSO en:</a:t>
+            </a:r>
+            <a:endParaRPr lang="es-PE" sz="600" b="1" dirty="0"/>
+          </a:p>
+          <a:p>
+            <a:pPr algn="ctr"/>
+            <a:r>
+              <a:rPr lang="es-PE" sz="2800" dirty="0">
+                <a:latin typeface="Britannic Bold" panose="020B0903060703020204" pitchFamily="34" charset="0"/>
+              </a:rPr>
+              <a:t>“{{TEMA_DIPLOMADO}}”</a:t>
+            </a:r>
+          </a:p>
+          <a:p>
+            <a:pPr algn="ctr"/>
+            <a:r>
+              <a:rPr lang="es-PE" b="1" dirty="0"/>
+              <a:t>Realizado del {{FECHA_INICIO}} al {{FECHA_FIN}}, con una</a:t>
+            </a:r>
+          </a:p>
+          <a:p>
+            <a:pPr algn="ctr"/>
+            <a:r>
+              <a:rPr lang="es-PE" b="1" dirty="0"/>
+              <a:t>duración de {{HORAS_ACADEMICAS}} horas lectivas y {{CREDITOS_ACADEMICOS}} créditos Académicos.</a:t>
+            </a:r>
+          </a:p>
+          <a:p>
+            <a:pPr algn="ctr"/>
+            <a:r>
+              <a:rPr lang="es-PE" b="1" dirty="0"/>
+              <a:t>Por tanto, se expide el presente Certificado, otorgándole los</a:t>
+            </a:r>
+          </a:p>
+          <a:p>
+            <a:pPr algn="ctr"/>
+            <a:r>
+              <a:rPr lang="es-PE" b="1" dirty="0"/>
+              <a:t>privilegios y consideraciones que le corresponden.</a:t>
+            </a:r>
+          </a:p>
+          <a:p>
+            <a:pPr algn="ctr"/>
+            <a:endParaRPr lang="es-PE" sz="400" b="1" dirty="0"/>
+          </a:p>
+          <a:p>
+            <a:pPr algn="r"/>
+            <a:r>
+              <a:rPr lang="es-PE" b="1" dirty="0"/>
+              <a:t>Trujillo, {{FECHA_EMISION_LARGA}}</a:t>
+            </a:r>
+          </a:p>
+        </p:txBody>
+      </p:sp>
     </p:spTree>
     <p:extLst>
       <p:ext uri="{BB962C8B-B14F-4D97-AF65-F5344CB8AC3E}">
@@ -4163,22 +4019,651 @@
           </a:p>
         </p:txBody>
       </p:sp>
+      <p:pic>
+        <p:nvPicPr>
+          <p:cNvPr id="12" name="Imagen 11"/>
+          <p:cNvPicPr>
+            <a:picLocks noChangeAspect="1"/>
+          </p:cNvPicPr>
+          <p:nvPr/>
+        </p:nvPicPr>
+        <p:blipFill>
+          <a:blip r:embed="rId3"/>
+          <a:stretch>
+            <a:fillRect/>
+          </a:stretch>
+        </p:blipFill>
+        <p:spPr>
+          <a:xfrm>
+            <a:off x="6298442" y="199447"/>
+            <a:ext cx="2957853" cy="758326"/>
+          </a:xfrm>
+          <a:prstGeom prst="rect">
+            <a:avLst/>
+          </a:prstGeom>
+        </p:spPr>
+      </p:pic>
+      <p:pic>
+        <p:nvPicPr>
+          <p:cNvPr id="27" name="Imagen 26"/>
+          <p:cNvPicPr>
+            <a:picLocks noChangeAspect="1"/>
+          </p:cNvPicPr>
+          <p:nvPr/>
+        </p:nvPicPr>
+        <p:blipFill rotWithShape="1">
+          <a:blip r:embed="rId4"/>
+          <a:srcRect l="4716" r="4485"/>
+          <a:stretch/>
+        </p:blipFill>
+        <p:spPr>
+          <a:xfrm>
+            <a:off x="534757" y="230243"/>
+            <a:ext cx="2563572" cy="864296"/>
+          </a:xfrm>
+          <a:prstGeom prst="rect">
+            <a:avLst/>
+          </a:prstGeom>
+        </p:spPr>
+      </p:pic>
+      <p:sp>
+        <p:nvSpPr>
+          <p:cNvPr id="28" name="CuadroTexto 27"/>
+          <p:cNvSpPr txBox="1"/>
+          <p:nvPr/>
+        </p:nvSpPr>
+        <p:spPr>
+          <a:xfrm>
+            <a:off x="792801" y="982048"/>
+            <a:ext cx="1642822" cy="338554"/>
+          </a:xfrm>
+          <a:prstGeom prst="rect">
+            <a:avLst/>
+          </a:prstGeom>
+          <a:noFill/>
+        </p:spPr>
+        <p:txBody>
+          <a:bodyPr wrap="none" rtlCol="0">
+            <a:spAutoFit/>
+          </a:bodyPr>
+          <a:lstStyle/>
+          <a:p>
+            <a:r>
+              <a:rPr lang="es-PE" sz="1600" b="1" dirty="0"/>
+              <a:t>R.P N° 1127 1967</a:t>
+            </a:r>
+          </a:p>
+        </p:txBody>
+      </p:sp>
       <p:graphicFrame>
         <p:nvGraphicFramePr>
-          <p:cNvPr id="20" name="Tabla 19"/>
+          <p:cNvPr id="24" name="Tabla 23"/>
           <p:cNvGraphicFramePr>
             <a:graphicFrameLocks noGrp="1"/>
           </p:cNvGraphicFramePr>
+          <p:nvPr/>
+        </p:nvGraphicFramePr>
+        <p:xfrm>
+          <a:off x="3203501" y="1539657"/>
+          <a:ext cx="6412523" cy="434622"/>
+        </p:xfrm>
+        <a:graphic>
+          <a:graphicData uri="http://schemas.openxmlformats.org/drawingml/2006/table">
+            <a:tbl>
+              <a:tblPr firstRow="1" bandRow="1">
+                <a:tableStyleId>{F5AB1C69-6EDB-4FF4-983F-18BD219EF322}</a:tableStyleId>
+              </a:tblPr>
+              <a:tblGrid>
+                <a:gridCol w="6412523">
+                  <a:extLst>
+                    <a:ext uri="{9D8B030D-6E8A-4147-A177-3AD203B41FA5}">
+                      <a16:colId xmlns:a16="http://schemas.microsoft.com/office/drawing/2014/main" val="335546556"/>
+                    </a:ext>
+                  </a:extLst>
+                </a:gridCol>
+              </a:tblGrid>
+              <a:tr h="308522">
+                <a:tc>
+                  <a:txBody>
+                    <a:bodyPr/>
+                    <a:lstStyle/>
+                    <a:p>
+                      <a:pPr algn="ctr"/>
+                      <a:r>
+                        <a:rPr lang="es-PE" sz="1600" u="none" dirty="0"/>
+                        <a:t>TEMARIO</a:t>
+                      </a:r>
+                      <a:endParaRPr lang="es-PE" sz="1600" u="none" baseline="0" dirty="0">
+                        <a:latin typeface="Arial Black" panose="020B0A04020102020204" pitchFamily="34" charset="0"/>
+                      </a:endParaRPr>
+                    </a:p>
+                  </a:txBody>
+                  <a:tcPr marL="190782" marR="190782" marT="95391" marB="95391" anchor="ctr">
+                    <a:lnL w="12700" cap="flat" cmpd="sng" algn="ctr">
+                      <a:solidFill>
+                        <a:schemeClr val="tx1"/>
+                      </a:solidFill>
+                      <a:prstDash val="solid"/>
+                      <a:round/>
+                      <a:headEnd type="none" w="med" len="med"/>
+                      <a:tailEnd type="none" w="med" len="med"/>
+                    </a:lnL>
+                    <a:lnR w="12700" cap="flat" cmpd="sng" algn="ctr">
+                      <a:solidFill>
+                        <a:schemeClr val="tx1"/>
+                      </a:solidFill>
+                      <a:prstDash val="solid"/>
+                      <a:round/>
+                      <a:headEnd type="none" w="med" len="med"/>
+                      <a:tailEnd type="none" w="med" len="med"/>
+                    </a:lnR>
+                    <a:lnT w="12700" cap="flat" cmpd="sng" algn="ctr">
+                      <a:solidFill>
+                        <a:schemeClr val="tx1"/>
+                      </a:solidFill>
+                      <a:prstDash val="solid"/>
+                      <a:round/>
+                      <a:headEnd type="none" w="med" len="med"/>
+                      <a:tailEnd type="none" w="med" len="med"/>
+                    </a:lnT>
+                    <a:lnB w="12700" cap="flat" cmpd="sng" algn="ctr">
+                      <a:solidFill>
+                        <a:schemeClr val="tx1"/>
+                      </a:solidFill>
+                      <a:prstDash val="solid"/>
+                      <a:round/>
+                      <a:headEnd type="none" w="med" len="med"/>
+                      <a:tailEnd type="none" w="med" len="med"/>
+                    </a:lnB>
+                    <a:lnTlToBr w="12700" cmpd="sng">
+                      <a:noFill/>
+                      <a:prstDash val="solid"/>
+                    </a:lnTlToBr>
+                    <a:lnBlToTr w="12700" cmpd="sng">
+                      <a:noFill/>
+                      <a:prstDash val="solid"/>
+                    </a:lnBlToTr>
+                  </a:tcPr>
+                </a:tc>
+                <a:extLst>
+                  <a:ext uri="{0D108BD9-81ED-4DB2-BD59-A6C34878D82A}">
+                    <a16:rowId xmlns:a16="http://schemas.microsoft.com/office/drawing/2014/main" val="4034874865"/>
+                  </a:ext>
+                </a:extLst>
+              </a:tr>
+            </a:tbl>
+          </a:graphicData>
+        </a:graphic>
+      </p:graphicFrame>
+      <p:graphicFrame>
+        <p:nvGraphicFramePr>
+          <p:cNvPr id="29" name="Tabla 28"/>
+          <p:cNvGraphicFramePr>
+            <a:graphicFrameLocks noGrp="1"/>
+          </p:cNvGraphicFramePr>
           <p:nvPr>
             <p:extLst>
               <p:ext uri="{D42A27DB-BD31-4B8C-83A1-F6EECF244321}">
-                <p14:modId xmlns:p14="http://schemas.microsoft.com/office/powerpoint/2010/main" val="3427282173"/>
+                <p14:modId xmlns:p14="http://schemas.microsoft.com/office/powerpoint/2010/main" val="1689896237"/>
               </p:ext>
             </p:extLst>
           </p:nvPr>
         </p:nvGraphicFramePr>
         <p:xfrm>
-          <a:off x="227269" y="2467252"/>
+          <a:off x="3203502" y="1974652"/>
+          <a:ext cx="6412523" cy="1495839"/>
+        </p:xfrm>
+        <a:graphic>
+          <a:graphicData uri="http://schemas.openxmlformats.org/drawingml/2006/table">
+            <a:tbl>
+              <a:tblPr firstRow="1" bandRow="1">
+                <a:tableStyleId>{D7AC3CCA-C797-4891-BE02-D94E43425B78}</a:tableStyleId>
+              </a:tblPr>
+              <a:tblGrid>
+                <a:gridCol w="2867389">
+                  <a:extLst>
+                    <a:ext uri="{9D8B030D-6E8A-4147-A177-3AD203B41FA5}">
+                      <a16:colId xmlns:a16="http://schemas.microsoft.com/office/drawing/2014/main" val="3108834388"/>
+                    </a:ext>
+                  </a:extLst>
+                </a:gridCol>
+                <a:gridCol w="3545134">
+                  <a:extLst>
+                    <a:ext uri="{9D8B030D-6E8A-4147-A177-3AD203B41FA5}">
+                      <a16:colId xmlns:a16="http://schemas.microsoft.com/office/drawing/2014/main" val="1484549653"/>
+                    </a:ext>
+                  </a:extLst>
+                </a:gridCol>
+              </a:tblGrid>
+              <a:tr h="269517">
+                <a:tc>
+                  <a:txBody>
+                    <a:bodyPr/>
+                    <a:lstStyle/>
+                    <a:p>
+                      <a:pPr marL="0" algn="ctr" defTabSz="914400" rtl="0" eaLnBrk="1" latinLnBrk="0" hangingPunct="1"/>
+                      <a:r>
+                        <a:rPr lang="es-PE" sz="1120" b="0" kern="1200" dirty="0">
+                          <a:solidFill>
+                            <a:schemeClr val="dk1"/>
+                          </a:solidFill>
+                          <a:latin typeface="+mn-lt"/>
+                          <a:ea typeface="+mn-ea"/>
+                          <a:cs typeface="+mn-cs"/>
+                        </a:rPr>
+                        <a:t>MÓDULO I</a:t>
+                      </a:r>
+                      <a:endParaRPr lang="en-US" sz="1120" b="0" kern="1200" dirty="0">
+                        <a:solidFill>
+                          <a:schemeClr val="dk1"/>
+                        </a:solidFill>
+                        <a:latin typeface="+mn-lt"/>
+                        <a:ea typeface="+mn-ea"/>
+                        <a:cs typeface="+mn-cs"/>
+                      </a:endParaRPr>
+                    </a:p>
+                  </a:txBody>
+                  <a:tcPr anchor="ctr"/>
+                </a:tc>
+                <a:tc>
+                  <a:txBody>
+                    <a:bodyPr/>
+                    <a:lstStyle/>
+                    <a:p>
+                      <a:pPr algn="ctr"/>
+                      <a:r>
+                        <a:rPr lang="es-ES" sz="1000" b="0" i="0" kern="1200" dirty="0">
+                          <a:solidFill>
+                            <a:schemeClr val="dk1"/>
+                          </a:solidFill>
+                          <a:effectLst/>
+                          <a:latin typeface="+mn-lt"/>
+                          <a:ea typeface="+mn-ea"/>
+                          <a:cs typeface="+mn-cs"/>
+                        </a:rPr>
+                        <a:t>{{MODULO_1}}</a:t>
+                      </a:r>
+                    </a:p>
+                  </a:txBody>
+                  <a:tcPr anchor="ctr"/>
+                </a:tc>
+                <a:extLst>
+                  <a:ext uri="{0D108BD9-81ED-4DB2-BD59-A6C34878D82A}">
+                    <a16:rowId xmlns:a16="http://schemas.microsoft.com/office/drawing/2014/main" val="200180495"/>
+                  </a:ext>
+                </a:extLst>
+              </a:tr>
+              <a:tr h="269517">
+                <a:tc>
+                  <a:txBody>
+                    <a:bodyPr/>
+                    <a:lstStyle/>
+                    <a:p>
+                      <a:pPr marL="0" algn="ctr" defTabSz="914400" rtl="0" eaLnBrk="1" latinLnBrk="0" hangingPunct="1"/>
+                      <a:r>
+                        <a:rPr lang="es-PE" sz="1120" kern="1200" dirty="0">
+                          <a:solidFill>
+                            <a:schemeClr val="dk1"/>
+                          </a:solidFill>
+                          <a:latin typeface="+mn-lt"/>
+                          <a:ea typeface="+mn-ea"/>
+                          <a:cs typeface="+mn-cs"/>
+                        </a:rPr>
+                        <a:t>MÓDULO II</a:t>
+                      </a:r>
+                      <a:endParaRPr lang="en-US" sz="1120" kern="1200" dirty="0">
+                        <a:solidFill>
+                          <a:schemeClr val="dk1"/>
+                        </a:solidFill>
+                        <a:latin typeface="+mn-lt"/>
+                        <a:ea typeface="+mn-ea"/>
+                        <a:cs typeface="+mn-cs"/>
+                      </a:endParaRPr>
+                    </a:p>
+                  </a:txBody>
+                  <a:tcPr anchor="ctr"/>
+                </a:tc>
+                <a:tc>
+                  <a:txBody>
+                    <a:bodyPr/>
+                    <a:lstStyle/>
+                    <a:p>
+                      <a:pPr algn="ctr"/>
+                      <a:r>
+                        <a:rPr lang="es-ES" sz="1000" b="0" i="0" kern="1200" dirty="0">
+                          <a:solidFill>
+                            <a:schemeClr val="dk1"/>
+                          </a:solidFill>
+                          <a:effectLst/>
+                          <a:latin typeface="+mn-lt"/>
+                          <a:ea typeface="+mn-ea"/>
+                          <a:cs typeface="+mn-cs"/>
+                        </a:rPr>
+                        <a:t>{{MODULO_2}}</a:t>
+                      </a:r>
+                    </a:p>
+                  </a:txBody>
+                  <a:tcPr anchor="ctr"/>
+                </a:tc>
+                <a:extLst>
+                  <a:ext uri="{0D108BD9-81ED-4DB2-BD59-A6C34878D82A}">
+                    <a16:rowId xmlns:a16="http://schemas.microsoft.com/office/drawing/2014/main" val="3180852981"/>
+                  </a:ext>
+                </a:extLst>
+              </a:tr>
+              <a:tr h="400568">
+                <a:tc>
+                  <a:txBody>
+                    <a:bodyPr/>
+                    <a:lstStyle/>
+                    <a:p>
+                      <a:pPr marL="0" algn="ctr" defTabSz="914400" rtl="0" eaLnBrk="1" latinLnBrk="0" hangingPunct="1"/>
+                      <a:r>
+                        <a:rPr lang="es-PE" sz="1120" kern="1200" dirty="0">
+                          <a:solidFill>
+                            <a:schemeClr val="dk1"/>
+                          </a:solidFill>
+                          <a:latin typeface="+mn-lt"/>
+                          <a:ea typeface="+mn-ea"/>
+                          <a:cs typeface="+mn-cs"/>
+                        </a:rPr>
+                        <a:t>MÓDULO III</a:t>
+                      </a:r>
+                      <a:endParaRPr lang="en-US" sz="1120" kern="1200" dirty="0">
+                        <a:solidFill>
+                          <a:schemeClr val="dk1"/>
+                        </a:solidFill>
+                        <a:latin typeface="+mn-lt"/>
+                        <a:ea typeface="+mn-ea"/>
+                        <a:cs typeface="+mn-cs"/>
+                      </a:endParaRPr>
+                    </a:p>
+                  </a:txBody>
+                  <a:tcPr anchor="ctr"/>
+                </a:tc>
+                <a:tc>
+                  <a:txBody>
+                    <a:bodyPr/>
+                    <a:lstStyle/>
+                    <a:p>
+                      <a:pPr algn="ctr"/>
+                      <a:r>
+                        <a:rPr lang="es-ES" sz="1000" b="0" i="0" kern="1200" dirty="0">
+                          <a:solidFill>
+                            <a:schemeClr val="dk1"/>
+                          </a:solidFill>
+                          <a:effectLst/>
+                          <a:latin typeface="+mn-lt"/>
+                          <a:ea typeface="+mn-ea"/>
+                          <a:cs typeface="+mn-cs"/>
+                        </a:rPr>
+                        <a:t>{{MODULO_3}}</a:t>
+                      </a:r>
+                    </a:p>
+                  </a:txBody>
+                  <a:tcPr anchor="ctr"/>
+                </a:tc>
+                <a:extLst>
+                  <a:ext uri="{0D108BD9-81ED-4DB2-BD59-A6C34878D82A}">
+                    <a16:rowId xmlns:a16="http://schemas.microsoft.com/office/drawing/2014/main" val="4272501331"/>
+                  </a:ext>
+                </a:extLst>
+              </a:tr>
+              <a:tr h="294109">
+                <a:tc>
+                  <a:txBody>
+                    <a:bodyPr/>
+                    <a:lstStyle/>
+                    <a:p>
+                      <a:pPr marL="0" algn="ctr" defTabSz="914400" rtl="0" eaLnBrk="1" latinLnBrk="0" hangingPunct="1"/>
+                      <a:r>
+                        <a:rPr lang="es-PE" sz="1120" kern="1200" dirty="0">
+                          <a:solidFill>
+                            <a:schemeClr val="dk1"/>
+                          </a:solidFill>
+                          <a:latin typeface="+mn-lt"/>
+                          <a:ea typeface="+mn-ea"/>
+                          <a:cs typeface="+mn-cs"/>
+                        </a:rPr>
+                        <a:t>MÓDULO IV</a:t>
+                      </a:r>
+                      <a:endParaRPr lang="en-US" sz="1120" kern="1200" dirty="0">
+                        <a:solidFill>
+                          <a:schemeClr val="dk1"/>
+                        </a:solidFill>
+                        <a:latin typeface="+mn-lt"/>
+                        <a:ea typeface="+mn-ea"/>
+                        <a:cs typeface="+mn-cs"/>
+                      </a:endParaRPr>
+                    </a:p>
+                  </a:txBody>
+                  <a:tcPr anchor="ctr"/>
+                </a:tc>
+                <a:tc>
+                  <a:txBody>
+                    <a:bodyPr/>
+                    <a:lstStyle/>
+                    <a:p>
+                      <a:pPr algn="ctr"/>
+                      <a:r>
+                        <a:rPr lang="es-ES" sz="1000" b="0" i="0" kern="1200" dirty="0">
+                          <a:solidFill>
+                            <a:schemeClr val="dk1"/>
+                          </a:solidFill>
+                          <a:effectLst/>
+                          <a:latin typeface="+mn-lt"/>
+                          <a:ea typeface="+mn-ea"/>
+                          <a:cs typeface="+mn-cs"/>
+                        </a:rPr>
+                        <a:t>{{MODULO_4}}</a:t>
+                      </a:r>
+                    </a:p>
+                  </a:txBody>
+                  <a:tcPr anchor="ctr"/>
+                </a:tc>
+                <a:extLst>
+                  <a:ext uri="{0D108BD9-81ED-4DB2-BD59-A6C34878D82A}">
+                    <a16:rowId xmlns:a16="http://schemas.microsoft.com/office/drawing/2014/main" val="2661531471"/>
+                  </a:ext>
+                </a:extLst>
+              </a:tr>
+              <a:tr h="182174">
+                <a:tc>
+                  <a:txBody>
+                    <a:bodyPr/>
+                    <a:lstStyle/>
+                    <a:p>
+                      <a:pPr marL="0" algn="ctr" defTabSz="914400" rtl="0" eaLnBrk="1" latinLnBrk="0" hangingPunct="1"/>
+                      <a:r>
+                        <a:rPr lang="es-PE" sz="1120" kern="1200" dirty="0">
+                          <a:solidFill>
+                            <a:schemeClr val="dk1"/>
+                          </a:solidFill>
+                          <a:latin typeface="+mn-lt"/>
+                          <a:ea typeface="+mn-ea"/>
+                          <a:cs typeface="+mn-cs"/>
+                        </a:rPr>
+                        <a:t>MÓDULO V</a:t>
+                      </a:r>
+                      <a:endParaRPr lang="en-US" sz="1120" kern="1200" dirty="0">
+                        <a:solidFill>
+                          <a:schemeClr val="dk1"/>
+                        </a:solidFill>
+                        <a:latin typeface="+mn-lt"/>
+                        <a:ea typeface="+mn-ea"/>
+                        <a:cs typeface="+mn-cs"/>
+                      </a:endParaRPr>
+                    </a:p>
+                  </a:txBody>
+                  <a:tcPr anchor="ctr"/>
+                </a:tc>
+                <a:tc>
+                  <a:txBody>
+                    <a:bodyPr/>
+                    <a:lstStyle/>
+                    <a:p>
+                      <a:pPr algn="ctr"/>
+                      <a:r>
+                        <a:rPr lang="es-ES" sz="1000" b="0" i="0" kern="1200" dirty="0">
+                          <a:solidFill>
+                            <a:schemeClr val="dk1"/>
+                          </a:solidFill>
+                          <a:effectLst/>
+                          <a:latin typeface="+mn-lt"/>
+                          <a:ea typeface="+mn-ea"/>
+                          <a:cs typeface="+mn-cs"/>
+                        </a:rPr>
+                        <a:t>{{MODULO_5}}</a:t>
+                      </a:r>
+                    </a:p>
+                  </a:txBody>
+                  <a:tcPr anchor="ctr"/>
+                </a:tc>
+                <a:extLst>
+                  <a:ext uri="{0D108BD9-81ED-4DB2-BD59-A6C34878D82A}">
+                    <a16:rowId xmlns:a16="http://schemas.microsoft.com/office/drawing/2014/main" val="3024625614"/>
+                  </a:ext>
+                </a:extLst>
+              </a:tr>
+            </a:tbl>
+          </a:graphicData>
+        </a:graphic>
+      </p:graphicFrame>
+      <p:grpSp>
+        <p:nvGrpSpPr>
+          <p:cNvPr id="2" name="Grupo 1">
+            <a:extLst>
+              <a:ext uri="{FF2B5EF4-FFF2-40B4-BE49-F238E27FC236}">
+                <a16:creationId xmlns:a16="http://schemas.microsoft.com/office/drawing/2014/main" id="{312778E5-C5C3-1423-0514-C1DD238BD466}"/>
+              </a:ext>
+            </a:extLst>
+          </p:cNvPr>
+          <p:cNvGrpSpPr/>
+          <p:nvPr/>
+        </p:nvGrpSpPr>
+        <p:grpSpPr>
+          <a:xfrm>
+            <a:off x="611025" y="6108603"/>
+            <a:ext cx="2297657" cy="437033"/>
+            <a:chOff x="4281274" y="8807352"/>
+            <a:chExt cx="2297657" cy="437033"/>
+          </a:xfrm>
+        </p:grpSpPr>
+        <p:sp>
+          <p:nvSpPr>
+            <p:cNvPr id="5" name="Rectángulo 4">
+              <a:extLst>
+                <a:ext uri="{FF2B5EF4-FFF2-40B4-BE49-F238E27FC236}">
+                  <a16:creationId xmlns:a16="http://schemas.microsoft.com/office/drawing/2014/main" id="{642AFA5E-411D-36E9-F3C9-5C13895B0119}"/>
+                </a:ext>
+              </a:extLst>
+            </p:cNvPr>
+            <p:cNvSpPr/>
+            <p:nvPr/>
+          </p:nvSpPr>
+          <p:spPr>
+            <a:xfrm>
+              <a:off x="4312624" y="8807352"/>
+              <a:ext cx="2213928" cy="437033"/>
+            </a:xfrm>
+            <a:prstGeom prst="rect">
+              <a:avLst/>
+            </a:prstGeom>
+            <a:noFill/>
+          </p:spPr>
+          <p:style>
+            <a:lnRef idx="2">
+              <a:schemeClr val="accent1">
+                <a:shade val="15000"/>
+              </a:schemeClr>
+            </a:lnRef>
+            <a:fillRef idx="1">
+              <a:schemeClr val="accent1"/>
+            </a:fillRef>
+            <a:effectRef idx="0">
+              <a:schemeClr val="accent1"/>
+            </a:effectRef>
+            <a:fontRef idx="minor">
+              <a:schemeClr val="lt1"/>
+            </a:fontRef>
+          </p:style>
+          <p:txBody>
+            <a:bodyPr rtlCol="0" anchor="ctr"/>
+            <a:lstStyle/>
+            <a:p>
+              <a:pPr algn="ctr"/>
+              <a:endParaRPr lang="es-PE"/>
+            </a:p>
+          </p:txBody>
+        </p:sp>
+        <p:sp>
+          <p:nvSpPr>
+            <p:cNvPr id="7" name="CuadroTexto 6">
+              <a:extLst>
+                <a:ext uri="{FF2B5EF4-FFF2-40B4-BE49-F238E27FC236}">
+                  <a16:creationId xmlns:a16="http://schemas.microsoft.com/office/drawing/2014/main" id="{B681738F-E09F-799A-2C96-1D1BD4FF4EB3}"/>
+                </a:ext>
+              </a:extLst>
+            </p:cNvPr>
+            <p:cNvSpPr txBox="1"/>
+            <p:nvPr/>
+          </p:nvSpPr>
+          <p:spPr>
+            <a:xfrm>
+              <a:off x="4281274" y="8809560"/>
+              <a:ext cx="2297657" cy="392415"/>
+            </a:xfrm>
+            <a:prstGeom prst="rect">
+              <a:avLst/>
+            </a:prstGeom>
+            <a:noFill/>
+          </p:spPr>
+          <p:txBody>
+            <a:bodyPr wrap="square" rtlCol="0">
+              <a:spAutoFit/>
+            </a:bodyPr>
+            <a:lstStyle/>
+            <a:p>
+              <a:r>
+                <a:rPr lang="es-PE" sz="650" b="1" dirty="0"/>
+                <a:t>PARA POSTERIOR VERIFICACIÓN DE ESTE CERTIFICADO SE PUEDE REALIZAR INGRESANDO EL CÓDIGO DEL ESTUDIANTE EN: </a:t>
+              </a:r>
+              <a:r>
+                <a:rPr lang="es-PE" sz="650" b="1" dirty="0">
+                  <a:hlinkClick r:id="rId5"/>
+                </a:rPr>
+                <a:t>https://especializacionvirtual.com/validar-certificado/</a:t>
+              </a:r>
+              <a:r>
+                <a:rPr lang="es-PE" sz="650" b="1" dirty="0"/>
+                <a:t> </a:t>
+              </a:r>
+            </a:p>
+          </p:txBody>
+        </p:sp>
+      </p:grpSp>
+      <p:graphicFrame>
+        <p:nvGraphicFramePr>
+          <p:cNvPr id="9" name="Tabla 8">
+            <a:extLst>
+              <a:ext uri="{FF2B5EF4-FFF2-40B4-BE49-F238E27FC236}">
+                <a16:creationId xmlns:a16="http://schemas.microsoft.com/office/drawing/2014/main" id="{9A93C8F0-4882-DD02-EEEB-8F91FEBA43CD}"/>
+              </a:ext>
+            </a:extLst>
+          </p:cNvPr>
+          <p:cNvGraphicFramePr>
+            <a:graphicFrameLocks noGrp="1"/>
+          </p:cNvGraphicFramePr>
+          <p:nvPr>
+            <p:extLst>
+              <p:ext uri="{D42A27DB-BD31-4B8C-83A1-F6EECF244321}">
+                <p14:modId xmlns:p14="http://schemas.microsoft.com/office/powerpoint/2010/main" val="2651142159"/>
+              </p:ext>
+            </p:extLst>
+          </p:nvPr>
+        </p:nvGraphicFramePr>
+        <p:xfrm>
+          <a:off x="227269" y="2243308"/>
           <a:ext cx="2916000" cy="1820685"/>
         </p:xfrm>
         <a:graphic>
@@ -4421,46 +4906,28 @@
           </a:graphicData>
         </a:graphic>
       </p:graphicFrame>
-      <p:pic>
-        <p:nvPicPr>
-          <p:cNvPr id="12" name="Imagen 11"/>
-          <p:cNvPicPr>
-            <a:picLocks noChangeAspect="1"/>
-          </p:cNvPicPr>
-          <p:nvPr/>
-        </p:nvPicPr>
-        <p:blipFill>
-          <a:blip r:embed="rId3"/>
-          <a:stretch>
-            <a:fillRect/>
-          </a:stretch>
-        </p:blipFill>
-        <p:spPr>
-          <a:xfrm>
-            <a:off x="6298442" y="199447"/>
-            <a:ext cx="2957853" cy="758326"/>
-          </a:xfrm>
-          <a:prstGeom prst="rect">
-            <a:avLst/>
-          </a:prstGeom>
-        </p:spPr>
-      </p:pic>
       <p:graphicFrame>
         <p:nvGraphicFramePr>
-          <p:cNvPr id="21" name="Tabla 20"/>
+          <p:cNvPr id="10" name="Tabla 9">
+            <a:extLst>
+              <a:ext uri="{FF2B5EF4-FFF2-40B4-BE49-F238E27FC236}">
+                <a16:creationId xmlns:a16="http://schemas.microsoft.com/office/drawing/2014/main" id="{F7E3DDC4-DC0E-989C-291E-FB7DFC1F9FC0}"/>
+              </a:ext>
+            </a:extLst>
+          </p:cNvPr>
           <p:cNvGraphicFramePr>
             <a:graphicFrameLocks noGrp="1"/>
           </p:cNvGraphicFramePr>
           <p:nvPr>
             <p:extLst>
               <p:ext uri="{D42A27DB-BD31-4B8C-83A1-F6EECF244321}">
-                <p14:modId xmlns:p14="http://schemas.microsoft.com/office/powerpoint/2010/main" val="4126049798"/>
+                <p14:modId xmlns:p14="http://schemas.microsoft.com/office/powerpoint/2010/main" val="3453394327"/>
               </p:ext>
             </p:extLst>
           </p:nvPr>
         </p:nvGraphicFramePr>
         <p:xfrm>
-          <a:off x="227269" y="4465779"/>
+          <a:off x="227269" y="4241835"/>
           <a:ext cx="2916000" cy="336094"/>
         </p:xfrm>
         <a:graphic>
@@ -4535,496 +5002,10 @@
       </p:graphicFrame>
       <p:pic>
         <p:nvPicPr>
-          <p:cNvPr id="27" name="Imagen 26"/>
-          <p:cNvPicPr>
-            <a:picLocks noChangeAspect="1"/>
-          </p:cNvPicPr>
-          <p:nvPr/>
-        </p:nvPicPr>
-        <p:blipFill rotWithShape="1">
-          <a:blip r:embed="rId4"/>
-          <a:srcRect l="4716" r="4485"/>
-          <a:stretch/>
-        </p:blipFill>
-        <p:spPr>
-          <a:xfrm>
-            <a:off x="534757" y="230243"/>
-            <a:ext cx="2563572" cy="864296"/>
-          </a:xfrm>
-          <a:prstGeom prst="rect">
-            <a:avLst/>
-          </a:prstGeom>
-        </p:spPr>
-      </p:pic>
-      <p:sp>
-        <p:nvSpPr>
-          <p:cNvPr id="28" name="CuadroTexto 27"/>
-          <p:cNvSpPr txBox="1"/>
-          <p:nvPr/>
-        </p:nvSpPr>
-        <p:spPr>
-          <a:xfrm>
-            <a:off x="792801" y="982048"/>
-            <a:ext cx="1642822" cy="338554"/>
-          </a:xfrm>
-          <a:prstGeom prst="rect">
-            <a:avLst/>
-          </a:prstGeom>
-          <a:noFill/>
-        </p:spPr>
-        <p:txBody>
-          <a:bodyPr wrap="none" rtlCol="0">
-            <a:spAutoFit/>
-          </a:bodyPr>
-          <a:lstStyle/>
-          <a:p>
-            <a:r>
-              <a:rPr lang="es-PE" sz="1600" b="1" dirty="0"/>
-              <a:t>R.P N° 1127 1967</a:t>
-            </a:r>
-          </a:p>
-        </p:txBody>
-      </p:sp>
-      <p:graphicFrame>
-        <p:nvGraphicFramePr>
-          <p:cNvPr id="24" name="Tabla 23"/>
-          <p:cNvGraphicFramePr>
-            <a:graphicFrameLocks noGrp="1"/>
-          </p:cNvGraphicFramePr>
-          <p:nvPr/>
-        </p:nvGraphicFramePr>
-        <p:xfrm>
-          <a:off x="3203501" y="1539657"/>
-          <a:ext cx="6412523" cy="434622"/>
-        </p:xfrm>
-        <a:graphic>
-          <a:graphicData uri="http://schemas.openxmlformats.org/drawingml/2006/table">
-            <a:tbl>
-              <a:tblPr firstRow="1" bandRow="1">
-                <a:tableStyleId>{F5AB1C69-6EDB-4FF4-983F-18BD219EF322}</a:tableStyleId>
-              </a:tblPr>
-              <a:tblGrid>
-                <a:gridCol w="6412523">
-                  <a:extLst>
-                    <a:ext uri="{9D8B030D-6E8A-4147-A177-3AD203B41FA5}">
-                      <a16:colId xmlns:a16="http://schemas.microsoft.com/office/drawing/2014/main" val="335546556"/>
-                    </a:ext>
-                  </a:extLst>
-                </a:gridCol>
-              </a:tblGrid>
-              <a:tr h="308522">
-                <a:tc>
-                  <a:txBody>
-                    <a:bodyPr/>
-                    <a:lstStyle/>
-                    <a:p>
-                      <a:pPr algn="ctr"/>
-                      <a:r>
-                        <a:rPr lang="es-PE" sz="1600" u="none" dirty="0"/>
-                        <a:t>TEMARIO</a:t>
-                      </a:r>
-                      <a:endParaRPr lang="es-PE" sz="1600" u="none" baseline="0" dirty="0">
-                        <a:latin typeface="Arial Black" panose="020B0A04020102020204" pitchFamily="34" charset="0"/>
-                      </a:endParaRPr>
-                    </a:p>
-                  </a:txBody>
-                  <a:tcPr marL="190782" marR="190782" marT="95391" marB="95391" anchor="ctr">
-                    <a:lnL w="12700" cap="flat" cmpd="sng" algn="ctr">
-                      <a:solidFill>
-                        <a:schemeClr val="tx1"/>
-                      </a:solidFill>
-                      <a:prstDash val="solid"/>
-                      <a:round/>
-                      <a:headEnd type="none" w="med" len="med"/>
-                      <a:tailEnd type="none" w="med" len="med"/>
-                    </a:lnL>
-                    <a:lnR w="12700" cap="flat" cmpd="sng" algn="ctr">
-                      <a:solidFill>
-                        <a:schemeClr val="tx1"/>
-                      </a:solidFill>
-                      <a:prstDash val="solid"/>
-                      <a:round/>
-                      <a:headEnd type="none" w="med" len="med"/>
-                      <a:tailEnd type="none" w="med" len="med"/>
-                    </a:lnR>
-                    <a:lnT w="12700" cap="flat" cmpd="sng" algn="ctr">
-                      <a:solidFill>
-                        <a:schemeClr val="tx1"/>
-                      </a:solidFill>
-                      <a:prstDash val="solid"/>
-                      <a:round/>
-                      <a:headEnd type="none" w="med" len="med"/>
-                      <a:tailEnd type="none" w="med" len="med"/>
-                    </a:lnT>
-                    <a:lnB w="12700" cap="flat" cmpd="sng" algn="ctr">
-                      <a:solidFill>
-                        <a:schemeClr val="tx1"/>
-                      </a:solidFill>
-                      <a:prstDash val="solid"/>
-                      <a:round/>
-                      <a:headEnd type="none" w="med" len="med"/>
-                      <a:tailEnd type="none" w="med" len="med"/>
-                    </a:lnB>
-                    <a:lnTlToBr w="12700" cmpd="sng">
-                      <a:noFill/>
-                      <a:prstDash val="solid"/>
-                    </a:lnTlToBr>
-                    <a:lnBlToTr w="12700" cmpd="sng">
-                      <a:noFill/>
-                      <a:prstDash val="solid"/>
-                    </a:lnBlToTr>
-                  </a:tcPr>
-                </a:tc>
-                <a:extLst>
-                  <a:ext uri="{0D108BD9-81ED-4DB2-BD59-A6C34878D82A}">
-                    <a16:rowId xmlns:a16="http://schemas.microsoft.com/office/drawing/2014/main" val="4034874865"/>
-                  </a:ext>
-                </a:extLst>
-              </a:tr>
-            </a:tbl>
-          </a:graphicData>
-        </a:graphic>
-      </p:graphicFrame>
-      <p:graphicFrame>
-        <p:nvGraphicFramePr>
-          <p:cNvPr id="29" name="Tabla 28"/>
-          <p:cNvGraphicFramePr>
-            <a:graphicFrameLocks noGrp="1"/>
-          </p:cNvGraphicFramePr>
-          <p:nvPr>
-            <p:extLst>
-              <p:ext uri="{D42A27DB-BD31-4B8C-83A1-F6EECF244321}">
-                <p14:modId xmlns:p14="http://schemas.microsoft.com/office/powerpoint/2010/main" val="2070939982"/>
-              </p:ext>
-            </p:extLst>
-          </p:nvPr>
-        </p:nvGraphicFramePr>
-        <p:xfrm>
-          <a:off x="3203502" y="1974652"/>
-          <a:ext cx="6412523" cy="1492791"/>
-        </p:xfrm>
-        <a:graphic>
-          <a:graphicData uri="http://schemas.openxmlformats.org/drawingml/2006/table">
-            <a:tbl>
-              <a:tblPr firstRow="1" bandRow="1">
-                <a:tableStyleId>{D7AC3CCA-C797-4891-BE02-D94E43425B78}</a:tableStyleId>
-              </a:tblPr>
-              <a:tblGrid>
-                <a:gridCol w="2867389">
-                  <a:extLst>
-                    <a:ext uri="{9D8B030D-6E8A-4147-A177-3AD203B41FA5}">
-                      <a16:colId xmlns:a16="http://schemas.microsoft.com/office/drawing/2014/main" val="3108834388"/>
-                    </a:ext>
-                  </a:extLst>
-                </a:gridCol>
-                <a:gridCol w="3545134">
-                  <a:extLst>
-                    <a:ext uri="{9D8B030D-6E8A-4147-A177-3AD203B41FA5}">
-                      <a16:colId xmlns:a16="http://schemas.microsoft.com/office/drawing/2014/main" val="1484549653"/>
-                    </a:ext>
-                  </a:extLst>
-                </a:gridCol>
-              </a:tblGrid>
-              <a:tr h="269517">
-                <a:tc>
-                  <a:txBody>
-                    <a:bodyPr/>
-                    <a:lstStyle/>
-                    <a:p>
-                      <a:pPr marL="0" algn="ctr" defTabSz="914400" rtl="0" eaLnBrk="1" latinLnBrk="0" hangingPunct="1"/>
-                      <a:r>
-                        <a:rPr lang="es-PE" sz="1100" b="0" kern="1200" dirty="0">
-                          <a:solidFill>
-                            <a:schemeClr val="dk1"/>
-                          </a:solidFill>
-                          <a:latin typeface="+mn-lt"/>
-                          <a:ea typeface="+mn-ea"/>
-                          <a:cs typeface="+mn-cs"/>
-                        </a:rPr>
-                        <a:t>MÓDULO I</a:t>
-                      </a:r>
-                      <a:endParaRPr lang="en-US" sz="1100" b="0" kern="1200" dirty="0">
-                        <a:solidFill>
-                          <a:schemeClr val="dk1"/>
-                        </a:solidFill>
-                        <a:latin typeface="+mn-lt"/>
-                        <a:ea typeface="+mn-ea"/>
-                        <a:cs typeface="+mn-cs"/>
-                      </a:endParaRPr>
-                    </a:p>
-                  </a:txBody>
-                  <a:tcPr anchor="ctr"/>
-                </a:tc>
-                <a:tc>
-                  <a:txBody>
-                    <a:bodyPr/>
-                    <a:lstStyle/>
-                    <a:p>
-                      <a:pPr algn="ctr"/>
-                      <a:r>
-                        <a:rPr lang="es-ES" sz="1100" b="0" i="0" kern="1200" dirty="0">
-                          <a:solidFill>
-                            <a:schemeClr val="dk1"/>
-                          </a:solidFill>
-                          <a:effectLst/>
-                          <a:latin typeface="+mn-lt"/>
-                          <a:ea typeface="+mn-ea"/>
-                          <a:cs typeface="+mn-cs"/>
-                        </a:rPr>
-                        <a:t>{{MODULO_1}}</a:t>
-                      </a:r>
-                    </a:p>
-                  </a:txBody>
-                  <a:tcPr anchor="ctr"/>
-                </a:tc>
-                <a:extLst>
-                  <a:ext uri="{0D108BD9-81ED-4DB2-BD59-A6C34878D82A}">
-                    <a16:rowId xmlns:a16="http://schemas.microsoft.com/office/drawing/2014/main" val="200180495"/>
-                  </a:ext>
-                </a:extLst>
-              </a:tr>
-              <a:tr h="269517">
-                <a:tc>
-                  <a:txBody>
-                    <a:bodyPr/>
-                    <a:lstStyle/>
-                    <a:p>
-                      <a:pPr marL="0" algn="ctr" defTabSz="914400" rtl="0" eaLnBrk="1" latinLnBrk="0" hangingPunct="1"/>
-                      <a:r>
-                        <a:rPr lang="es-PE" sz="1100" kern="1200" dirty="0">
-                          <a:solidFill>
-                            <a:schemeClr val="dk1"/>
-                          </a:solidFill>
-                          <a:latin typeface="+mn-lt"/>
-                          <a:ea typeface="+mn-ea"/>
-                          <a:cs typeface="+mn-cs"/>
-                        </a:rPr>
-                        <a:t>MÓDULO II</a:t>
-                      </a:r>
-                      <a:endParaRPr lang="en-US" sz="1100" kern="1200" dirty="0">
-                        <a:solidFill>
-                          <a:schemeClr val="dk1"/>
-                        </a:solidFill>
-                        <a:latin typeface="+mn-lt"/>
-                        <a:ea typeface="+mn-ea"/>
-                        <a:cs typeface="+mn-cs"/>
-                      </a:endParaRPr>
-                    </a:p>
-                  </a:txBody>
-                  <a:tcPr anchor="ctr"/>
-                </a:tc>
-                <a:tc>
-                  <a:txBody>
-                    <a:bodyPr/>
-                    <a:lstStyle/>
-                    <a:p>
-                      <a:pPr algn="ctr"/>
-                      <a:r>
-                        <a:rPr lang="es-ES" sz="1100" b="0" i="0" kern="1200" dirty="0">
-                          <a:solidFill>
-                            <a:schemeClr val="dk1"/>
-                          </a:solidFill>
-                          <a:effectLst/>
-                          <a:latin typeface="+mn-lt"/>
-                          <a:ea typeface="+mn-ea"/>
-                          <a:cs typeface="+mn-cs"/>
-                        </a:rPr>
-                        <a:t>{{MODULO_2}}</a:t>
-                      </a:r>
-                    </a:p>
-                  </a:txBody>
-                  <a:tcPr anchor="ctr"/>
-                </a:tc>
-                <a:extLst>
-                  <a:ext uri="{0D108BD9-81ED-4DB2-BD59-A6C34878D82A}">
-                    <a16:rowId xmlns:a16="http://schemas.microsoft.com/office/drawing/2014/main" val="3180852981"/>
-                  </a:ext>
-                </a:extLst>
-              </a:tr>
-              <a:tr h="400568">
-                <a:tc>
-                  <a:txBody>
-                    <a:bodyPr/>
-                    <a:lstStyle/>
-                    <a:p>
-                      <a:pPr marL="0" algn="ctr" defTabSz="914400" rtl="0" eaLnBrk="1" latinLnBrk="0" hangingPunct="1"/>
-                      <a:r>
-                        <a:rPr lang="es-PE" sz="1100" kern="1200" dirty="0">
-                          <a:solidFill>
-                            <a:schemeClr val="dk1"/>
-                          </a:solidFill>
-                          <a:latin typeface="+mn-lt"/>
-                          <a:ea typeface="+mn-ea"/>
-                          <a:cs typeface="+mn-cs"/>
-                        </a:rPr>
-                        <a:t>MÓDULO III</a:t>
-                      </a:r>
-                      <a:endParaRPr lang="en-US" sz="1100" kern="1200" dirty="0">
-                        <a:solidFill>
-                          <a:schemeClr val="dk1"/>
-                        </a:solidFill>
-                        <a:latin typeface="+mn-lt"/>
-                        <a:ea typeface="+mn-ea"/>
-                        <a:cs typeface="+mn-cs"/>
-                      </a:endParaRPr>
-                    </a:p>
-                  </a:txBody>
-                  <a:tcPr anchor="ctr"/>
-                </a:tc>
-                <a:tc>
-                  <a:txBody>
-                    <a:bodyPr/>
-                    <a:lstStyle/>
-                    <a:p>
-                      <a:pPr algn="ctr"/>
-                      <a:r>
-                        <a:rPr lang="es-ES" sz="1100" b="0" i="0" kern="1200" dirty="0">
-                          <a:solidFill>
-                            <a:schemeClr val="dk1"/>
-                          </a:solidFill>
-                          <a:effectLst/>
-                          <a:latin typeface="+mn-lt"/>
-                          <a:ea typeface="+mn-ea"/>
-                          <a:cs typeface="+mn-cs"/>
-                        </a:rPr>
-                        <a:t>{{MODULO_3}}</a:t>
-                      </a:r>
-                    </a:p>
-                  </a:txBody>
-                  <a:tcPr anchor="ctr"/>
-                </a:tc>
-                <a:extLst>
-                  <a:ext uri="{0D108BD9-81ED-4DB2-BD59-A6C34878D82A}">
-                    <a16:rowId xmlns:a16="http://schemas.microsoft.com/office/drawing/2014/main" val="4272501331"/>
-                  </a:ext>
-                </a:extLst>
-              </a:tr>
-              <a:tr h="294109">
-                <a:tc>
-                  <a:txBody>
-                    <a:bodyPr/>
-                    <a:lstStyle/>
-                    <a:p>
-                      <a:pPr marL="0" algn="ctr" defTabSz="914400" rtl="0" eaLnBrk="1" latinLnBrk="0" hangingPunct="1"/>
-                      <a:r>
-                        <a:rPr lang="es-PE" sz="1100" kern="1200" dirty="0">
-                          <a:solidFill>
-                            <a:schemeClr val="dk1"/>
-                          </a:solidFill>
-                          <a:latin typeface="+mn-lt"/>
-                          <a:ea typeface="+mn-ea"/>
-                          <a:cs typeface="+mn-cs"/>
-                        </a:rPr>
-                        <a:t>MÓDULO IV</a:t>
-                      </a:r>
-                      <a:endParaRPr lang="en-US" sz="1100" kern="1200" dirty="0">
-                        <a:solidFill>
-                          <a:schemeClr val="dk1"/>
-                        </a:solidFill>
-                        <a:latin typeface="+mn-lt"/>
-                        <a:ea typeface="+mn-ea"/>
-                        <a:cs typeface="+mn-cs"/>
-                      </a:endParaRPr>
-                    </a:p>
-                  </a:txBody>
-                  <a:tcPr anchor="ctr"/>
-                </a:tc>
-                <a:tc>
-                  <a:txBody>
-                    <a:bodyPr/>
-                    <a:lstStyle/>
-                    <a:p>
-                      <a:pPr algn="ctr"/>
-                      <a:r>
-                        <a:rPr lang="es-ES" sz="1100" b="0" i="0" kern="1200" dirty="0">
-                          <a:solidFill>
-                            <a:schemeClr val="dk1"/>
-                          </a:solidFill>
-                          <a:effectLst/>
-                          <a:latin typeface="+mn-lt"/>
-                          <a:ea typeface="+mn-ea"/>
-                          <a:cs typeface="+mn-cs"/>
-                        </a:rPr>
-                        <a:t>{{MODULO_4}}</a:t>
-                      </a:r>
-                    </a:p>
-                  </a:txBody>
-                  <a:tcPr anchor="ctr"/>
-                </a:tc>
-                <a:extLst>
-                  <a:ext uri="{0D108BD9-81ED-4DB2-BD59-A6C34878D82A}">
-                    <a16:rowId xmlns:a16="http://schemas.microsoft.com/office/drawing/2014/main" val="2661531471"/>
-                  </a:ext>
-                </a:extLst>
-              </a:tr>
-              <a:tr h="182174">
-                <a:tc>
-                  <a:txBody>
-                    <a:bodyPr/>
-                    <a:lstStyle/>
-                    <a:p>
-                      <a:pPr marL="0" algn="ctr" defTabSz="914400" rtl="0" eaLnBrk="1" latinLnBrk="0" hangingPunct="1"/>
-                      <a:r>
-                        <a:rPr lang="es-PE" sz="1100" kern="1200" dirty="0">
-                          <a:solidFill>
-                            <a:schemeClr val="dk1"/>
-                          </a:solidFill>
-                          <a:latin typeface="+mn-lt"/>
-                          <a:ea typeface="+mn-ea"/>
-                          <a:cs typeface="+mn-cs"/>
-                        </a:rPr>
-                        <a:t>MÓDULO V</a:t>
-                      </a:r>
-                      <a:endParaRPr lang="en-US" sz="1100" kern="1200" dirty="0">
-                        <a:solidFill>
-                          <a:schemeClr val="dk1"/>
-                        </a:solidFill>
-                        <a:latin typeface="+mn-lt"/>
-                        <a:ea typeface="+mn-ea"/>
-                        <a:cs typeface="+mn-cs"/>
-                      </a:endParaRPr>
-                    </a:p>
-                  </a:txBody>
-                  <a:tcPr anchor="ctr"/>
-                </a:tc>
-                <a:tc>
-                  <a:txBody>
-                    <a:bodyPr/>
-                    <a:lstStyle/>
-                    <a:p>
-                      <a:pPr algn="ctr"/>
-                      <a:r>
-                        <a:rPr lang="es-ES" sz="1100" b="0" i="0" kern="1200" dirty="0">
-                          <a:solidFill>
-                            <a:schemeClr val="dk1"/>
-                          </a:solidFill>
-                          <a:effectLst/>
-                          <a:latin typeface="+mn-lt"/>
-                          <a:ea typeface="+mn-ea"/>
-                          <a:cs typeface="+mn-cs"/>
-                        </a:rPr>
-                        <a:t>{{MODULO_5}}</a:t>
-                      </a:r>
-                    </a:p>
-                  </a:txBody>
-                  <a:tcPr anchor="ctr"/>
-                </a:tc>
-                <a:extLst>
-                  <a:ext uri="{0D108BD9-81ED-4DB2-BD59-A6C34878D82A}">
-                    <a16:rowId xmlns:a16="http://schemas.microsoft.com/office/drawing/2014/main" val="3024625614"/>
-                  </a:ext>
-                </a:extLst>
-              </a:tr>
-            </a:tbl>
-          </a:graphicData>
-        </a:graphic>
-      </p:graphicFrame>
-      <p:pic>
-        <p:nvPicPr>
-          <p:cNvPr id="3" name="Imagen 2">
+          <p:cNvPr id="11" name="Imagen 10">
             <a:extLst>
               <a:ext uri="{FF2B5EF4-FFF2-40B4-BE49-F238E27FC236}">
-                <a16:creationId xmlns:a16="http://schemas.microsoft.com/office/drawing/2014/main" id="{AB7EE0B6-B919-423B-6A1B-5DB7F9F6C8DB}"/>
+                <a16:creationId xmlns:a16="http://schemas.microsoft.com/office/drawing/2014/main" id="{204FCACD-2965-14E0-CE9E-D95D09074B30}"/>
               </a:ext>
             </a:extLst>
           </p:cNvPr>
@@ -5034,13 +5015,13 @@
           <p:nvPr/>
         </p:nvPicPr>
         <p:blipFill rotWithShape="1">
-          <a:blip r:embed="rId5"/>
+          <a:blip r:embed="rId6"/>
           <a:srcRect b="6974"/>
           <a:stretch/>
         </p:blipFill>
         <p:spPr>
           <a:xfrm>
-            <a:off x="1486822" y="3957005"/>
+            <a:off x="1486822" y="3733061"/>
             <a:ext cx="455266" cy="308814"/>
           </a:xfrm>
           <a:prstGeom prst="rect">
@@ -5050,10 +5031,10 @@
       </p:pic>
       <p:sp>
         <p:nvSpPr>
-          <p:cNvPr id="4" name="CuadroTexto 3">
+          <p:cNvPr id="13" name="CuadroTexto 12">
             <a:extLst>
               <a:ext uri="{FF2B5EF4-FFF2-40B4-BE49-F238E27FC236}">
-                <a16:creationId xmlns:a16="http://schemas.microsoft.com/office/drawing/2014/main" id="{385E0D12-7AAE-301C-8B48-6FE48D0B69EE}"/>
+                <a16:creationId xmlns:a16="http://schemas.microsoft.com/office/drawing/2014/main" id="{5AFDFDE8-80C6-7D39-B795-B36C64E8F5A2}"/>
               </a:ext>
             </a:extLst>
           </p:cNvPr>
@@ -5062,7 +5043,7 @@
         </p:nvSpPr>
         <p:spPr>
           <a:xfrm>
-            <a:off x="1113988" y="5089855"/>
+            <a:off x="1255776" y="4659232"/>
             <a:ext cx="1397690" cy="369332"/>
           </a:xfrm>
           <a:prstGeom prst="rect">
@@ -5170,10 +5151,83 @@
             </a:lvl9pPr>
           </a:lstStyle>
           <a:p>
+            <a:pPr algn="ctr"/>
             <a:r>
               <a:rPr lang="es-PE" dirty="0"/>
               <a:t>{{QR_CODE}}</a:t>
             </a:r>
+          </a:p>
+        </p:txBody>
+      </p:sp>
+      <p:sp>
+        <p:nvSpPr>
+          <p:cNvPr id="3" name="Rectángulo 2">
+            <a:extLst>
+              <a:ext uri="{FF2B5EF4-FFF2-40B4-BE49-F238E27FC236}">
+                <a16:creationId xmlns:a16="http://schemas.microsoft.com/office/drawing/2014/main" id="{31A2BAB6-DD06-AFB7-A779-64054FB1AAEC}"/>
+              </a:ext>
+            </a:extLst>
+          </p:cNvPr>
+          <p:cNvSpPr/>
+          <p:nvPr/>
+        </p:nvSpPr>
+        <p:spPr>
+          <a:xfrm>
+            <a:off x="684240" y="5727842"/>
+            <a:ext cx="2130198" cy="366767"/>
+          </a:xfrm>
+          <a:prstGeom prst="rect">
+            <a:avLst/>
+          </a:prstGeom>
+        </p:spPr>
+        <p:txBody>
+          <a:bodyPr wrap="square">
+            <a:spAutoFit/>
+          </a:bodyPr>
+          <a:lstStyle/>
+          <a:p>
+            <a:pPr lvl="0" algn="ctr">
+              <a:spcBef>
+                <a:spcPts val="59"/>
+              </a:spcBef>
+            </a:pPr>
+            <a:r>
+              <a:rPr lang="es-PE" sz="900" dirty="0">
+                <a:solidFill>
+                  <a:prstClr val="black"/>
+                </a:solidFill>
+                <a:latin typeface="Times New Roman" panose="02020603050405020304" pitchFamily="18" charset="0"/>
+                <a:ea typeface="Cambria Math" panose="02040503050406030204" pitchFamily="18" charset="0"/>
+                <a:cs typeface="Times New Roman" panose="02020603050405020304" pitchFamily="18" charset="0"/>
+              </a:rPr>
+              <a:t>CÓDIGO ESTUDIANTE:</a:t>
+            </a:r>
+          </a:p>
+          <a:p>
+            <a:pPr algn="ctr">
+              <a:spcBef>
+                <a:spcPts val="59"/>
+              </a:spcBef>
+            </a:pPr>
+            <a:r>
+              <a:rPr lang="en-US" sz="800" b="1">
+                <a:solidFill>
+                  <a:prstClr val="black"/>
+                </a:solidFill>
+                <a:latin typeface="Times New Roman" panose="02020603050405020304" pitchFamily="18" charset="0"/>
+                <a:ea typeface="Cambria Math" panose="02040503050406030204" pitchFamily="18" charset="0"/>
+                <a:cs typeface="Times New Roman" panose="02020603050405020304" pitchFamily="18" charset="0"/>
+              </a:rPr>
+              <a:t>{{CODE_STUDENT}}</a:t>
+            </a:r>
+            <a:endParaRPr lang="en-US" sz="800" b="1" dirty="0">
+              <a:solidFill>
+                <a:prstClr val="black"/>
+              </a:solidFill>
+              <a:latin typeface="Times New Roman" panose="02020603050405020304" pitchFamily="18" charset="0"/>
+              <a:ea typeface="Cambria Math" panose="02040503050406030204" pitchFamily="18" charset="0"/>
+              <a:cs typeface="Times New Roman" panose="02020603050405020304" pitchFamily="18" charset="0"/>
+            </a:endParaRPr>
           </a:p>
         </p:txBody>
       </p:sp>
